--- a/OpenSource/6.Git_Basics.pptx
+++ b/OpenSource/6.Git_Basics.pptx
@@ -2802,6 +2802,13 @@
           </a:solidFill>
           <a:ln/>
         </p:spPr>
+        <p:txBody>
+          <a:bodyPr/>
+          <a:lstStyle/>
+          <a:p>
+            <a:endParaRPr lang="ko-KR" altLang="en-US"/>
+          </a:p>
+        </p:txBody>
       </p:sp>
       <p:sp>
         <p:nvSpPr>
@@ -2822,6 +2829,13 @@
           </a:solidFill>
           <a:ln/>
         </p:spPr>
+        <p:txBody>
+          <a:bodyPr/>
+          <a:lstStyle/>
+          <a:p>
+            <a:endParaRPr lang="ko-KR" altLang="en-US"/>
+          </a:p>
+        </p:txBody>
       </p:sp>
       <p:sp>
         <p:nvSpPr>
@@ -2842,6 +2856,13 @@
           </a:solidFill>
           <a:ln/>
         </p:spPr>
+        <p:txBody>
+          <a:bodyPr/>
+          <a:lstStyle/>
+          <a:p>
+            <a:endParaRPr lang="ko-KR" altLang="en-US"/>
+          </a:p>
+        </p:txBody>
       </p:sp>
       <p:sp>
         <p:nvSpPr>
@@ -2862,6 +2883,13 @@
           </a:solidFill>
           <a:ln/>
         </p:spPr>
+        <p:txBody>
+          <a:bodyPr/>
+          <a:lstStyle/>
+          <a:p>
+            <a:endParaRPr lang="ko-KR" altLang="en-US"/>
+          </a:p>
+        </p:txBody>
       </p:sp>
       <p:sp>
         <p:nvSpPr>
@@ -2882,6 +2910,13 @@
           </a:solidFill>
           <a:ln/>
         </p:spPr>
+        <p:txBody>
+          <a:bodyPr/>
+          <a:lstStyle/>
+          <a:p>
+            <a:endParaRPr lang="ko-KR" altLang="en-US"/>
+          </a:p>
+        </p:txBody>
       </p:sp>
       <p:sp>
         <p:nvSpPr>
@@ -2902,6 +2937,13 @@
           </a:solidFill>
           <a:ln/>
         </p:spPr>
+        <p:txBody>
+          <a:bodyPr/>
+          <a:lstStyle/>
+          <a:p>
+            <a:endParaRPr lang="ko-KR" altLang="en-US"/>
+          </a:p>
+        </p:txBody>
       </p:sp>
       <p:sp>
         <p:nvSpPr>
@@ -2922,6 +2964,13 @@
           </a:solidFill>
           <a:ln/>
         </p:spPr>
+        <p:txBody>
+          <a:bodyPr/>
+          <a:lstStyle/>
+          <a:p>
+            <a:endParaRPr lang="ko-KR" altLang="en-US"/>
+          </a:p>
+        </p:txBody>
       </p:sp>
       <p:sp>
         <p:nvSpPr>
@@ -2942,6 +2991,13 @@
           </a:solidFill>
           <a:ln/>
         </p:spPr>
+        <p:txBody>
+          <a:bodyPr/>
+          <a:lstStyle/>
+          <a:p>
+            <a:endParaRPr lang="ko-KR" altLang="en-US"/>
+          </a:p>
+        </p:txBody>
       </p:sp>
       <p:sp>
         <p:nvSpPr>
@@ -2962,6 +3018,13 @@
           </a:solidFill>
           <a:ln/>
         </p:spPr>
+        <p:txBody>
+          <a:bodyPr/>
+          <a:lstStyle/>
+          <a:p>
+            <a:endParaRPr lang="ko-KR" altLang="en-US"/>
+          </a:p>
+        </p:txBody>
       </p:sp>
       <p:sp>
         <p:nvSpPr>
@@ -2982,6 +3045,13 @@
           </a:solidFill>
           <a:ln/>
         </p:spPr>
+        <p:txBody>
+          <a:bodyPr/>
+          <a:lstStyle/>
+          <a:p>
+            <a:endParaRPr lang="ko-KR" altLang="en-US"/>
+          </a:p>
+        </p:txBody>
       </p:sp>
       <p:sp>
         <p:nvSpPr>
@@ -3002,6 +3072,13 @@
           </a:solidFill>
           <a:ln/>
         </p:spPr>
+        <p:txBody>
+          <a:bodyPr/>
+          <a:lstStyle/>
+          <a:p>
+            <a:endParaRPr lang="ko-KR" altLang="en-US"/>
+          </a:p>
+        </p:txBody>
       </p:sp>
       <p:sp>
         <p:nvSpPr>
@@ -3022,6 +3099,13 @@
           </a:solidFill>
           <a:ln/>
         </p:spPr>
+        <p:txBody>
+          <a:bodyPr/>
+          <a:lstStyle/>
+          <a:p>
+            <a:endParaRPr lang="ko-KR" altLang="en-US"/>
+          </a:p>
+        </p:txBody>
       </p:sp>
       <p:sp>
         <p:nvSpPr>
@@ -3042,6 +3126,13 @@
           </a:solidFill>
           <a:ln/>
         </p:spPr>
+        <p:txBody>
+          <a:bodyPr/>
+          <a:lstStyle/>
+          <a:p>
+            <a:endParaRPr lang="ko-KR" altLang="en-US"/>
+          </a:p>
+        </p:txBody>
       </p:sp>
       <p:sp>
         <p:nvSpPr>
@@ -3062,6 +3153,13 @@
           </a:solidFill>
           <a:ln/>
         </p:spPr>
+        <p:txBody>
+          <a:bodyPr/>
+          <a:lstStyle/>
+          <a:p>
+            <a:endParaRPr lang="ko-KR" altLang="en-US"/>
+          </a:p>
+        </p:txBody>
       </p:sp>
       <p:sp>
         <p:nvSpPr>
@@ -3082,6 +3180,13 @@
           </a:solidFill>
           <a:ln/>
         </p:spPr>
+        <p:txBody>
+          <a:bodyPr/>
+          <a:lstStyle/>
+          <a:p>
+            <a:endParaRPr lang="ko-KR" altLang="en-US"/>
+          </a:p>
+        </p:txBody>
       </p:sp>
       <p:sp>
         <p:nvSpPr>
@@ -3102,6 +3207,13 @@
           </a:solidFill>
           <a:ln/>
         </p:spPr>
+        <p:txBody>
+          <a:bodyPr/>
+          <a:lstStyle/>
+          <a:p>
+            <a:endParaRPr lang="ko-KR" altLang="en-US"/>
+          </a:p>
+        </p:txBody>
       </p:sp>
       <p:sp>
         <p:nvSpPr>
@@ -3122,6 +3234,13 @@
           </a:solidFill>
           <a:ln/>
         </p:spPr>
+        <p:txBody>
+          <a:bodyPr/>
+          <a:lstStyle/>
+          <a:p>
+            <a:endParaRPr lang="ko-KR" altLang="en-US"/>
+          </a:p>
+        </p:txBody>
       </p:sp>
       <p:sp>
         <p:nvSpPr>
@@ -3142,6 +3261,13 @@
           </a:solidFill>
           <a:ln/>
         </p:spPr>
+        <p:txBody>
+          <a:bodyPr/>
+          <a:lstStyle/>
+          <a:p>
+            <a:endParaRPr lang="ko-KR" altLang="en-US"/>
+          </a:p>
+        </p:txBody>
       </p:sp>
       <p:sp>
         <p:nvSpPr>
@@ -3162,6 +3288,13 @@
           </a:solidFill>
           <a:ln/>
         </p:spPr>
+        <p:txBody>
+          <a:bodyPr/>
+          <a:lstStyle/>
+          <a:p>
+            <a:endParaRPr lang="ko-KR" altLang="en-US"/>
+          </a:p>
+        </p:txBody>
       </p:sp>
       <p:sp>
         <p:nvSpPr>
@@ -3182,6 +3315,13 @@
           </a:solidFill>
           <a:ln/>
         </p:spPr>
+        <p:txBody>
+          <a:bodyPr/>
+          <a:lstStyle/>
+          <a:p>
+            <a:endParaRPr lang="ko-KR" altLang="en-US"/>
+          </a:p>
+        </p:txBody>
       </p:sp>
       <p:sp>
         <p:nvSpPr>
@@ -3202,6 +3342,13 @@
           </a:solidFill>
           <a:ln/>
         </p:spPr>
+        <p:txBody>
+          <a:bodyPr/>
+          <a:lstStyle/>
+          <a:p>
+            <a:endParaRPr lang="ko-KR" altLang="en-US"/>
+          </a:p>
+        </p:txBody>
       </p:sp>
       <p:sp>
         <p:nvSpPr>
@@ -3222,6 +3369,13 @@
           </a:solidFill>
           <a:ln/>
         </p:spPr>
+        <p:txBody>
+          <a:bodyPr/>
+          <a:lstStyle/>
+          <a:p>
+            <a:endParaRPr lang="ko-KR" altLang="en-US"/>
+          </a:p>
+        </p:txBody>
       </p:sp>
       <p:sp>
         <p:nvSpPr>
@@ -3242,6 +3396,13 @@
           </a:solidFill>
           <a:ln/>
         </p:spPr>
+        <p:txBody>
+          <a:bodyPr/>
+          <a:lstStyle/>
+          <a:p>
+            <a:endParaRPr lang="ko-KR" altLang="en-US"/>
+          </a:p>
+        </p:txBody>
       </p:sp>
       <p:sp>
         <p:nvSpPr>
@@ -3262,6 +3423,13 @@
           </a:solidFill>
           <a:ln/>
         </p:spPr>
+        <p:txBody>
+          <a:bodyPr/>
+          <a:lstStyle/>
+          <a:p>
+            <a:endParaRPr lang="ko-KR" altLang="en-US"/>
+          </a:p>
+        </p:txBody>
       </p:sp>
       <p:sp>
         <p:nvSpPr>
@@ -3284,6 +3452,13 @@
           </a:solidFill>
           <a:ln/>
         </p:spPr>
+        <p:txBody>
+          <a:bodyPr/>
+          <a:lstStyle/>
+          <a:p>
+            <a:endParaRPr lang="ko-KR" altLang="en-US"/>
+          </a:p>
+        </p:txBody>
       </p:sp>
       <p:sp>
         <p:nvSpPr>
@@ -3534,6 +3709,13 @@
           </a:solidFill>
           <a:ln/>
         </p:spPr>
+        <p:txBody>
+          <a:bodyPr/>
+          <a:lstStyle/>
+          <a:p>
+            <a:endParaRPr lang="ko-KR" altLang="en-US"/>
+          </a:p>
+        </p:txBody>
       </p:sp>
       <p:sp>
         <p:nvSpPr>
@@ -3758,6 +3940,13 @@
             </a:outerShdw>
           </a:effectLst>
         </p:spPr>
+        <p:txBody>
+          <a:bodyPr/>
+          <a:lstStyle/>
+          <a:p>
+            <a:endParaRPr lang="ko-KR" altLang="en-US"/>
+          </a:p>
+        </p:txBody>
       </p:sp>
       <p:sp>
         <p:nvSpPr>
@@ -3778,6 +3967,13 @@
           </a:solidFill>
           <a:ln/>
         </p:spPr>
+        <p:txBody>
+          <a:bodyPr/>
+          <a:lstStyle/>
+          <a:p>
+            <a:endParaRPr lang="ko-KR" altLang="en-US"/>
+          </a:p>
+        </p:txBody>
       </p:sp>
       <p:sp>
         <p:nvSpPr>
@@ -3798,6 +3994,13 @@
           </a:solidFill>
           <a:ln/>
         </p:spPr>
+        <p:txBody>
+          <a:bodyPr/>
+          <a:lstStyle/>
+          <a:p>
+            <a:endParaRPr lang="ko-KR" altLang="en-US"/>
+          </a:p>
+        </p:txBody>
       </p:sp>
       <p:sp>
         <p:nvSpPr>
@@ -3818,6 +4021,13 @@
           </a:solidFill>
           <a:ln/>
         </p:spPr>
+        <p:txBody>
+          <a:bodyPr/>
+          <a:lstStyle/>
+          <a:p>
+            <a:endParaRPr lang="ko-KR" altLang="en-US"/>
+          </a:p>
+        </p:txBody>
       </p:sp>
       <p:sp>
         <p:nvSpPr>
@@ -4088,6 +4298,13 @@
           </a:solidFill>
           <a:ln/>
         </p:spPr>
+        <p:txBody>
+          <a:bodyPr/>
+          <a:lstStyle/>
+          <a:p>
+            <a:endParaRPr lang="ko-KR" altLang="en-US"/>
+          </a:p>
+        </p:txBody>
       </p:sp>
       <p:sp>
         <p:nvSpPr>
@@ -4196,6 +4413,13 @@
           </a:solidFill>
           <a:ln/>
         </p:spPr>
+        <p:txBody>
+          <a:bodyPr/>
+          <a:lstStyle/>
+          <a:p>
+            <a:endParaRPr lang="ko-KR" altLang="en-US"/>
+          </a:p>
+        </p:txBody>
       </p:sp>
       <p:sp>
         <p:nvSpPr>
@@ -4420,6 +4644,13 @@
             </a:outerShdw>
           </a:effectLst>
         </p:spPr>
+        <p:txBody>
+          <a:bodyPr/>
+          <a:lstStyle/>
+          <a:p>
+            <a:endParaRPr lang="ko-KR" altLang="en-US"/>
+          </a:p>
+        </p:txBody>
       </p:sp>
       <p:sp>
         <p:nvSpPr>
@@ -4440,6 +4671,13 @@
           </a:solidFill>
           <a:ln/>
         </p:spPr>
+        <p:txBody>
+          <a:bodyPr/>
+          <a:lstStyle/>
+          <a:p>
+            <a:endParaRPr lang="ko-KR" altLang="en-US"/>
+          </a:p>
+        </p:txBody>
       </p:sp>
       <p:sp>
         <p:nvSpPr>
@@ -4460,6 +4698,13 @@
           </a:solidFill>
           <a:ln/>
         </p:spPr>
+        <p:txBody>
+          <a:bodyPr/>
+          <a:lstStyle/>
+          <a:p>
+            <a:endParaRPr lang="ko-KR" altLang="en-US"/>
+          </a:p>
+        </p:txBody>
       </p:sp>
       <p:sp>
         <p:nvSpPr>
@@ -4480,6 +4725,13 @@
           </a:solidFill>
           <a:ln/>
         </p:spPr>
+        <p:txBody>
+          <a:bodyPr/>
+          <a:lstStyle/>
+          <a:p>
+            <a:endParaRPr lang="ko-KR" altLang="en-US"/>
+          </a:p>
+        </p:txBody>
       </p:sp>
       <p:sp>
         <p:nvSpPr>
@@ -4701,6 +4953,13 @@
           </a:solidFill>
           <a:ln/>
         </p:spPr>
+        <p:txBody>
+          <a:bodyPr/>
+          <a:lstStyle/>
+          <a:p>
+            <a:endParaRPr lang="ko-KR" altLang="en-US"/>
+          </a:p>
+        </p:txBody>
       </p:sp>
       <p:sp>
         <p:nvSpPr>
@@ -4795,6 +5054,13 @@
           </a:solidFill>
           <a:ln/>
         </p:spPr>
+        <p:txBody>
+          <a:bodyPr/>
+          <a:lstStyle/>
+          <a:p>
+            <a:endParaRPr lang="ko-KR" altLang="en-US"/>
+          </a:p>
+        </p:txBody>
       </p:sp>
       <p:sp>
         <p:nvSpPr>
@@ -4903,6 +5169,13 @@
           </a:solidFill>
           <a:ln/>
         </p:spPr>
+        <p:txBody>
+          <a:bodyPr/>
+          <a:lstStyle/>
+          <a:p>
+            <a:endParaRPr lang="ko-KR" altLang="en-US"/>
+          </a:p>
+        </p:txBody>
       </p:sp>
       <p:sp>
         <p:nvSpPr>
@@ -5125,6 +5398,13 @@
             <a:prstDash val="solid"/>
           </a:ln>
         </p:spPr>
+        <p:txBody>
+          <a:bodyPr/>
+          <a:lstStyle/>
+          <a:p>
+            <a:endParaRPr lang="ko-KR" altLang="en-US"/>
+          </a:p>
+        </p:txBody>
       </p:sp>
       <p:sp>
         <p:nvSpPr>
@@ -5211,6 +5491,13 @@
             <a:tailEnd type="triangle"/>
           </a:ln>
         </p:spPr>
+        <p:txBody>
+          <a:bodyPr/>
+          <a:lstStyle/>
+          <a:p>
+            <a:endParaRPr lang="ko-KR" altLang="en-US"/>
+          </a:p>
+        </p:txBody>
       </p:sp>
       <p:sp>
         <p:nvSpPr>
@@ -5277,6 +5564,13 @@
             <a:prstDash val="solid"/>
           </a:ln>
         </p:spPr>
+        <p:txBody>
+          <a:bodyPr/>
+          <a:lstStyle/>
+          <a:p>
+            <a:endParaRPr lang="ko-KR" altLang="en-US"/>
+          </a:p>
+        </p:txBody>
       </p:sp>
       <p:sp>
         <p:nvSpPr>
@@ -5363,6 +5657,13 @@
             <a:tailEnd type="triangle"/>
           </a:ln>
         </p:spPr>
+        <p:txBody>
+          <a:bodyPr/>
+          <a:lstStyle/>
+          <a:p>
+            <a:endParaRPr lang="ko-KR" altLang="en-US"/>
+          </a:p>
+        </p:txBody>
       </p:sp>
       <p:sp>
         <p:nvSpPr>
@@ -5429,6 +5730,13 @@
             <a:prstDash val="solid"/>
           </a:ln>
         </p:spPr>
+        <p:txBody>
+          <a:bodyPr/>
+          <a:lstStyle/>
+          <a:p>
+            <a:endParaRPr lang="ko-KR" altLang="en-US"/>
+          </a:p>
+        </p:txBody>
       </p:sp>
       <p:sp>
         <p:nvSpPr>
@@ -5515,6 +5823,13 @@
             <a:tailEnd type="triangle"/>
           </a:ln>
         </p:spPr>
+        <p:txBody>
+          <a:bodyPr/>
+          <a:lstStyle/>
+          <a:p>
+            <a:endParaRPr lang="ko-KR" altLang="en-US"/>
+          </a:p>
+        </p:txBody>
       </p:sp>
       <p:sp>
         <p:nvSpPr>
@@ -5581,6 +5896,13 @@
             <a:prstDash val="solid"/>
           </a:ln>
         </p:spPr>
+        <p:txBody>
+          <a:bodyPr/>
+          <a:lstStyle/>
+          <a:p>
+            <a:endParaRPr lang="ko-KR" altLang="en-US"/>
+          </a:p>
+        </p:txBody>
       </p:sp>
       <p:sp>
         <p:nvSpPr>
@@ -5704,6 +6026,13 @@
           </a:solidFill>
           <a:ln/>
         </p:spPr>
+        <p:txBody>
+          <a:bodyPr/>
+          <a:lstStyle/>
+          <a:p>
+            <a:endParaRPr lang="ko-KR" altLang="en-US"/>
+          </a:p>
+        </p:txBody>
       </p:sp>
       <p:sp>
         <p:nvSpPr>
@@ -5814,6 +6143,13 @@
             <a:prstDash val="solid"/>
           </a:ln>
         </p:spPr>
+        <p:txBody>
+          <a:bodyPr/>
+          <a:lstStyle/>
+          <a:p>
+            <a:endParaRPr lang="ko-KR" altLang="en-US"/>
+          </a:p>
+        </p:txBody>
       </p:sp>
       <p:sp>
         <p:nvSpPr>
@@ -5977,6 +6313,13 @@
           </a:solidFill>
           <a:ln/>
         </p:spPr>
+        <p:txBody>
+          <a:bodyPr/>
+          <a:lstStyle/>
+          <a:p>
+            <a:endParaRPr lang="ko-KR" altLang="en-US"/>
+          </a:p>
+        </p:txBody>
       </p:sp>
       <p:sp>
         <p:nvSpPr>
@@ -6206,6 +6549,13 @@
             </a:outerShdw>
           </a:effectLst>
         </p:spPr>
+        <p:txBody>
+          <a:bodyPr/>
+          <a:lstStyle/>
+          <a:p>
+            <a:endParaRPr lang="ko-KR" altLang="en-US"/>
+          </a:p>
+        </p:txBody>
       </p:sp>
       <p:sp>
         <p:nvSpPr>
@@ -6226,6 +6576,13 @@
           </a:solidFill>
           <a:ln/>
         </p:spPr>
+        <p:txBody>
+          <a:bodyPr/>
+          <a:lstStyle/>
+          <a:p>
+            <a:endParaRPr lang="ko-KR" altLang="en-US"/>
+          </a:p>
+        </p:txBody>
       </p:sp>
       <p:sp>
         <p:nvSpPr>
@@ -6380,6 +6737,13 @@
             </a:outerShdw>
           </a:effectLst>
         </p:spPr>
+        <p:txBody>
+          <a:bodyPr/>
+          <a:lstStyle/>
+          <a:p>
+            <a:endParaRPr lang="ko-KR" altLang="en-US"/>
+          </a:p>
+        </p:txBody>
       </p:sp>
       <p:sp>
         <p:nvSpPr>
@@ -6400,6 +6764,13 @@
           </a:solidFill>
           <a:ln/>
         </p:spPr>
+        <p:txBody>
+          <a:bodyPr/>
+          <a:lstStyle/>
+          <a:p>
+            <a:endParaRPr lang="ko-KR" altLang="en-US"/>
+          </a:p>
+        </p:txBody>
       </p:sp>
       <p:sp>
         <p:nvSpPr>
@@ -6549,6 +6920,13 @@
             </a:outerShdw>
           </a:effectLst>
         </p:spPr>
+        <p:txBody>
+          <a:bodyPr/>
+          <a:lstStyle/>
+          <a:p>
+            <a:endParaRPr lang="ko-KR" altLang="en-US"/>
+          </a:p>
+        </p:txBody>
       </p:sp>
       <p:sp>
         <p:nvSpPr>
@@ -6569,6 +6947,13 @@
           </a:solidFill>
           <a:ln/>
         </p:spPr>
+        <p:txBody>
+          <a:bodyPr/>
+          <a:lstStyle/>
+          <a:p>
+            <a:endParaRPr lang="ko-KR" altLang="en-US"/>
+          </a:p>
+        </p:txBody>
       </p:sp>
       <p:sp>
         <p:nvSpPr>
@@ -6589,6 +6974,13 @@
           </a:solidFill>
           <a:ln/>
         </p:spPr>
+        <p:txBody>
+          <a:bodyPr/>
+          <a:lstStyle/>
+          <a:p>
+            <a:endParaRPr lang="ko-KR" altLang="en-US"/>
+          </a:p>
+        </p:txBody>
       </p:sp>
       <p:sp>
         <p:nvSpPr>
@@ -6609,6 +7001,13 @@
           </a:solidFill>
           <a:ln/>
         </p:spPr>
+        <p:txBody>
+          <a:bodyPr/>
+          <a:lstStyle/>
+          <a:p>
+            <a:endParaRPr lang="ko-KR" altLang="en-US"/>
+          </a:p>
+        </p:txBody>
       </p:sp>
       <p:sp>
         <p:nvSpPr>
@@ -6700,6 +7099,13 @@
             </a:outerShdw>
           </a:effectLst>
         </p:spPr>
+        <p:txBody>
+          <a:bodyPr/>
+          <a:lstStyle/>
+          <a:p>
+            <a:endParaRPr lang="ko-KR" altLang="en-US"/>
+          </a:p>
+        </p:txBody>
       </p:sp>
       <p:sp>
         <p:nvSpPr>
@@ -6720,6 +7126,13 @@
           </a:solidFill>
           <a:ln/>
         </p:spPr>
+        <p:txBody>
+          <a:bodyPr/>
+          <a:lstStyle/>
+          <a:p>
+            <a:endParaRPr lang="ko-KR" altLang="en-US"/>
+          </a:p>
+        </p:txBody>
       </p:sp>
       <p:sp>
         <p:nvSpPr>
@@ -6740,6 +7153,13 @@
           </a:solidFill>
           <a:ln/>
         </p:spPr>
+        <p:txBody>
+          <a:bodyPr/>
+          <a:lstStyle/>
+          <a:p>
+            <a:endParaRPr lang="ko-KR" altLang="en-US"/>
+          </a:p>
+        </p:txBody>
       </p:sp>
       <p:sp>
         <p:nvSpPr>
@@ -6760,6 +7180,13 @@
           </a:solidFill>
           <a:ln/>
         </p:spPr>
+        <p:txBody>
+          <a:bodyPr/>
+          <a:lstStyle/>
+          <a:p>
+            <a:endParaRPr lang="ko-KR" altLang="en-US"/>
+          </a:p>
+        </p:txBody>
       </p:sp>
       <p:sp>
         <p:nvSpPr>
@@ -6824,6 +7251,13 @@
           </a:solidFill>
           <a:ln/>
         </p:spPr>
+        <p:txBody>
+          <a:bodyPr/>
+          <a:lstStyle/>
+          <a:p>
+            <a:endParaRPr lang="ko-KR" altLang="en-US"/>
+          </a:p>
+        </p:txBody>
       </p:sp>
       <p:sp>
         <p:nvSpPr>
@@ -6932,6 +7366,13 @@
           </a:solidFill>
           <a:ln/>
         </p:spPr>
+        <p:txBody>
+          <a:bodyPr/>
+          <a:lstStyle/>
+          <a:p>
+            <a:endParaRPr lang="ko-KR" altLang="en-US"/>
+          </a:p>
+        </p:txBody>
       </p:sp>
       <p:sp>
         <p:nvSpPr>
@@ -7156,6 +7597,13 @@
             </a:outerShdw>
           </a:effectLst>
         </p:spPr>
+        <p:txBody>
+          <a:bodyPr/>
+          <a:lstStyle/>
+          <a:p>
+            <a:endParaRPr lang="ko-KR" altLang="en-US"/>
+          </a:p>
+        </p:txBody>
       </p:sp>
       <p:sp>
         <p:nvSpPr>
@@ -7176,6 +7624,13 @@
           </a:solidFill>
           <a:ln/>
         </p:spPr>
+        <p:txBody>
+          <a:bodyPr/>
+          <a:lstStyle/>
+          <a:p>
+            <a:endParaRPr lang="ko-KR" altLang="en-US"/>
+          </a:p>
+        </p:txBody>
       </p:sp>
       <p:sp>
         <p:nvSpPr>
@@ -7196,6 +7651,13 @@
           </a:solidFill>
           <a:ln/>
         </p:spPr>
+        <p:txBody>
+          <a:bodyPr/>
+          <a:lstStyle/>
+          <a:p>
+            <a:endParaRPr lang="ko-KR" altLang="en-US"/>
+          </a:p>
+        </p:txBody>
       </p:sp>
       <p:sp>
         <p:nvSpPr>
@@ -7216,6 +7678,13 @@
           </a:solidFill>
           <a:ln/>
         </p:spPr>
+        <p:txBody>
+          <a:bodyPr/>
+          <a:lstStyle/>
+          <a:p>
+            <a:endParaRPr lang="ko-KR" altLang="en-US"/>
+          </a:p>
+        </p:txBody>
       </p:sp>
       <p:sp>
         <p:nvSpPr>
@@ -7446,6 +7915,13 @@
             </a:outerShdw>
           </a:effectLst>
         </p:spPr>
+        <p:txBody>
+          <a:bodyPr/>
+          <a:lstStyle/>
+          <a:p>
+            <a:endParaRPr lang="ko-KR" altLang="en-US"/>
+          </a:p>
+        </p:txBody>
       </p:sp>
       <p:sp>
         <p:nvSpPr>
@@ -7466,6 +7942,13 @@
           </a:solidFill>
           <a:ln/>
         </p:spPr>
+        <p:txBody>
+          <a:bodyPr/>
+          <a:lstStyle/>
+          <a:p>
+            <a:endParaRPr lang="ko-KR" altLang="en-US"/>
+          </a:p>
+        </p:txBody>
       </p:sp>
       <p:sp>
         <p:nvSpPr>
@@ -7486,6 +7969,13 @@
           </a:solidFill>
           <a:ln/>
         </p:spPr>
+        <p:txBody>
+          <a:bodyPr/>
+          <a:lstStyle/>
+          <a:p>
+            <a:endParaRPr lang="ko-KR" altLang="en-US"/>
+          </a:p>
+        </p:txBody>
       </p:sp>
       <p:sp>
         <p:nvSpPr>
@@ -7506,6 +7996,13 @@
           </a:solidFill>
           <a:ln/>
         </p:spPr>
+        <p:txBody>
+          <a:bodyPr/>
+          <a:lstStyle/>
+          <a:p>
+            <a:endParaRPr lang="ko-KR" altLang="en-US"/>
+          </a:p>
+        </p:txBody>
       </p:sp>
       <p:sp>
         <p:nvSpPr>
@@ -7649,6 +8146,13 @@
           </a:solidFill>
           <a:ln/>
         </p:spPr>
+        <p:txBody>
+          <a:bodyPr/>
+          <a:lstStyle/>
+          <a:p>
+            <a:endParaRPr lang="ko-KR" altLang="en-US"/>
+          </a:p>
+        </p:txBody>
       </p:sp>
       <p:sp>
         <p:nvSpPr>
@@ -7757,6 +8261,13 @@
           </a:solidFill>
           <a:ln/>
         </p:spPr>
+        <p:txBody>
+          <a:bodyPr/>
+          <a:lstStyle/>
+          <a:p>
+            <a:endParaRPr lang="ko-KR" altLang="en-US"/>
+          </a:p>
+        </p:txBody>
       </p:sp>
       <p:sp>
         <p:nvSpPr>
@@ -7981,6 +8492,13 @@
             </a:outerShdw>
           </a:effectLst>
         </p:spPr>
+        <p:txBody>
+          <a:bodyPr/>
+          <a:lstStyle/>
+          <a:p>
+            <a:endParaRPr lang="ko-KR" altLang="en-US"/>
+          </a:p>
+        </p:txBody>
       </p:sp>
       <p:sp>
         <p:nvSpPr>
@@ -8001,6 +8519,13 @@
           </a:solidFill>
           <a:ln/>
         </p:spPr>
+        <p:txBody>
+          <a:bodyPr/>
+          <a:lstStyle/>
+          <a:p>
+            <a:endParaRPr lang="ko-KR" altLang="en-US"/>
+          </a:p>
+        </p:txBody>
       </p:sp>
       <p:sp>
         <p:nvSpPr>
@@ -8021,6 +8546,13 @@
           </a:solidFill>
           <a:ln/>
         </p:spPr>
+        <p:txBody>
+          <a:bodyPr/>
+          <a:lstStyle/>
+          <a:p>
+            <a:endParaRPr lang="ko-KR" altLang="en-US"/>
+          </a:p>
+        </p:txBody>
       </p:sp>
       <p:sp>
         <p:nvSpPr>
@@ -8041,6 +8573,13 @@
           </a:solidFill>
           <a:ln/>
         </p:spPr>
+        <p:txBody>
+          <a:bodyPr/>
+          <a:lstStyle/>
+          <a:p>
+            <a:endParaRPr lang="ko-KR" altLang="en-US"/>
+          </a:p>
+        </p:txBody>
       </p:sp>
       <p:sp>
         <p:nvSpPr>
@@ -8191,6 +8730,13 @@
             </a:outerShdw>
           </a:effectLst>
         </p:spPr>
+        <p:txBody>
+          <a:bodyPr/>
+          <a:lstStyle/>
+          <a:p>
+            <a:endParaRPr lang="ko-KR" altLang="en-US"/>
+          </a:p>
+        </p:txBody>
       </p:sp>
       <p:sp>
         <p:nvSpPr>
@@ -8211,6 +8757,13 @@
           </a:solidFill>
           <a:ln/>
         </p:spPr>
+        <p:txBody>
+          <a:bodyPr/>
+          <a:lstStyle/>
+          <a:p>
+            <a:endParaRPr lang="ko-KR" altLang="en-US"/>
+          </a:p>
+        </p:txBody>
       </p:sp>
       <p:sp>
         <p:nvSpPr>
@@ -8231,6 +8784,13 @@
           </a:solidFill>
           <a:ln/>
         </p:spPr>
+        <p:txBody>
+          <a:bodyPr/>
+          <a:lstStyle/>
+          <a:p>
+            <a:endParaRPr lang="ko-KR" altLang="en-US"/>
+          </a:p>
+        </p:txBody>
       </p:sp>
       <p:sp>
         <p:nvSpPr>
@@ -8251,6 +8811,13 @@
           </a:solidFill>
           <a:ln/>
         </p:spPr>
+        <p:txBody>
+          <a:bodyPr/>
+          <a:lstStyle/>
+          <a:p>
+            <a:endParaRPr lang="ko-KR" altLang="en-US"/>
+          </a:p>
+        </p:txBody>
       </p:sp>
       <p:sp>
         <p:nvSpPr>
@@ -8374,6 +8941,13 @@
           </a:solidFill>
           <a:ln/>
         </p:spPr>
+        <p:txBody>
+          <a:bodyPr/>
+          <a:lstStyle/>
+          <a:p>
+            <a:endParaRPr lang="ko-KR" altLang="en-US"/>
+          </a:p>
+        </p:txBody>
       </p:sp>
       <p:sp>
         <p:nvSpPr>
@@ -8482,6 +9056,13 @@
           </a:solidFill>
           <a:ln/>
         </p:spPr>
+        <p:txBody>
+          <a:bodyPr/>
+          <a:lstStyle/>
+          <a:p>
+            <a:endParaRPr lang="ko-KR" altLang="en-US"/>
+          </a:p>
+        </p:txBody>
       </p:sp>
       <p:sp>
         <p:nvSpPr>
@@ -8672,6 +9253,13 @@
             </a:outerShdw>
           </a:effectLst>
         </p:spPr>
+        <p:txBody>
+          <a:bodyPr/>
+          <a:lstStyle/>
+          <a:p>
+            <a:endParaRPr lang="ko-KR" altLang="en-US"/>
+          </a:p>
+        </p:txBody>
       </p:sp>
       <p:sp>
         <p:nvSpPr>
@@ -8777,6 +9365,13 @@
             <a:tailEnd type="triangle"/>
           </a:ln>
         </p:spPr>
+        <p:txBody>
+          <a:bodyPr/>
+          <a:lstStyle/>
+          <a:p>
+            <a:endParaRPr lang="ko-KR" altLang="en-US"/>
+          </a:p>
+        </p:txBody>
       </p:sp>
       <p:sp>
         <p:nvSpPr>
@@ -8811,6 +9406,13 @@
             </a:outerShdw>
           </a:effectLst>
         </p:spPr>
+        <p:txBody>
+          <a:bodyPr/>
+          <a:lstStyle/>
+          <a:p>
+            <a:endParaRPr lang="ko-KR" altLang="en-US"/>
+          </a:p>
+        </p:txBody>
       </p:sp>
       <p:sp>
         <p:nvSpPr>
@@ -8968,6 +9570,13 @@
             <a:tailEnd type="triangle"/>
           </a:ln>
         </p:spPr>
+        <p:txBody>
+          <a:bodyPr/>
+          <a:lstStyle/>
+          <a:p>
+            <a:endParaRPr lang="ko-KR" altLang="en-US"/>
+          </a:p>
+        </p:txBody>
       </p:sp>
       <p:sp>
         <p:nvSpPr>
@@ -9002,6 +9611,13 @@
             </a:outerShdw>
           </a:effectLst>
         </p:spPr>
+        <p:txBody>
+          <a:bodyPr/>
+          <a:lstStyle/>
+          <a:p>
+            <a:endParaRPr lang="ko-KR" altLang="en-US"/>
+          </a:p>
+        </p:txBody>
       </p:sp>
       <p:sp>
         <p:nvSpPr>
@@ -9350,6 +9966,13 @@
             </a:outerShdw>
           </a:effectLst>
         </p:spPr>
+        <p:txBody>
+          <a:bodyPr/>
+          <a:lstStyle/>
+          <a:p>
+            <a:endParaRPr lang="ko-KR" altLang="en-US"/>
+          </a:p>
+        </p:txBody>
       </p:sp>
       <p:sp>
         <p:nvSpPr>
@@ -9370,6 +9993,13 @@
           </a:solidFill>
           <a:ln/>
         </p:spPr>
+        <p:txBody>
+          <a:bodyPr/>
+          <a:lstStyle/>
+          <a:p>
+            <a:endParaRPr lang="ko-KR" altLang="en-US"/>
+          </a:p>
+        </p:txBody>
       </p:sp>
       <p:sp>
         <p:nvSpPr>
@@ -9390,6 +10020,13 @@
           </a:solidFill>
           <a:ln/>
         </p:spPr>
+        <p:txBody>
+          <a:bodyPr/>
+          <a:lstStyle/>
+          <a:p>
+            <a:endParaRPr lang="ko-KR" altLang="en-US"/>
+          </a:p>
+        </p:txBody>
       </p:sp>
       <p:sp>
         <p:nvSpPr>
@@ -9410,6 +10047,13 @@
           </a:solidFill>
           <a:ln/>
         </p:spPr>
+        <p:txBody>
+          <a:bodyPr/>
+          <a:lstStyle/>
+          <a:p>
+            <a:endParaRPr lang="ko-KR" altLang="en-US"/>
+          </a:p>
+        </p:txBody>
       </p:sp>
       <p:sp>
         <p:nvSpPr>
@@ -9599,6 +10243,13 @@
           </a:solidFill>
           <a:ln/>
         </p:spPr>
+        <p:txBody>
+          <a:bodyPr/>
+          <a:lstStyle/>
+          <a:p>
+            <a:endParaRPr lang="ko-KR" altLang="en-US"/>
+          </a:p>
+        </p:txBody>
       </p:sp>
       <p:sp>
         <p:nvSpPr>
@@ -9821,6 +10472,13 @@
             <a:prstDash val="solid"/>
           </a:ln>
         </p:spPr>
+        <p:txBody>
+          <a:bodyPr/>
+          <a:lstStyle/>
+          <a:p>
+            <a:endParaRPr lang="ko-KR" altLang="en-US"/>
+          </a:p>
+        </p:txBody>
       </p:sp>
       <p:sp>
         <p:nvSpPr>
@@ -9946,6 +10604,13 @@
             <a:tailEnd type="triangle"/>
           </a:ln>
         </p:spPr>
+        <p:txBody>
+          <a:bodyPr/>
+          <a:lstStyle/>
+          <a:p>
+            <a:endParaRPr lang="ko-KR" altLang="en-US"/>
+          </a:p>
+        </p:txBody>
       </p:sp>
       <p:sp>
         <p:nvSpPr>
@@ -10012,6 +10677,13 @@
             <a:prstDash val="solid"/>
           </a:ln>
         </p:spPr>
+        <p:txBody>
+          <a:bodyPr/>
+          <a:lstStyle/>
+          <a:p>
+            <a:endParaRPr lang="ko-KR" altLang="en-US"/>
+          </a:p>
+        </p:txBody>
       </p:sp>
       <p:sp>
         <p:nvSpPr>
@@ -10137,6 +10809,13 @@
             <a:tailEnd type="triangle"/>
           </a:ln>
         </p:spPr>
+        <p:txBody>
+          <a:bodyPr/>
+          <a:lstStyle/>
+          <a:p>
+            <a:endParaRPr lang="ko-KR" altLang="en-US"/>
+          </a:p>
+        </p:txBody>
       </p:sp>
       <p:sp>
         <p:nvSpPr>
@@ -10203,6 +10882,13 @@
             <a:prstDash val="solid"/>
           </a:ln>
         </p:spPr>
+        <p:txBody>
+          <a:bodyPr/>
+          <a:lstStyle/>
+          <a:p>
+            <a:endParaRPr lang="ko-KR" altLang="en-US"/>
+          </a:p>
+        </p:txBody>
       </p:sp>
       <p:sp>
         <p:nvSpPr>
@@ -10941,6 +11627,13 @@
             <a:prstDash val="dash"/>
           </a:ln>
         </p:spPr>
+        <p:txBody>
+          <a:bodyPr/>
+          <a:lstStyle/>
+          <a:p>
+            <a:endParaRPr lang="ko-KR" altLang="en-US"/>
+          </a:p>
+        </p:txBody>
       </p:sp>
       <p:sp>
         <p:nvSpPr>
@@ -10965,6 +11658,13 @@
             <a:tailEnd type="triangle"/>
           </a:ln>
         </p:spPr>
+        <p:txBody>
+          <a:bodyPr/>
+          <a:lstStyle/>
+          <a:p>
+            <a:endParaRPr lang="ko-KR" altLang="en-US"/>
+          </a:p>
+        </p:txBody>
       </p:sp>
       <p:sp>
         <p:nvSpPr>
@@ -11031,6 +11731,13 @@
             <a:prstDash val="solid"/>
           </a:ln>
         </p:spPr>
+        <p:txBody>
+          <a:bodyPr/>
+          <a:lstStyle/>
+          <a:p>
+            <a:endParaRPr lang="ko-KR" altLang="en-US"/>
+          </a:p>
+        </p:txBody>
       </p:sp>
       <p:sp>
         <p:nvSpPr>
@@ -11132,6 +11839,13 @@
             <a:prstDash val="solid"/>
           </a:ln>
         </p:spPr>
+        <p:txBody>
+          <a:bodyPr/>
+          <a:lstStyle/>
+          <a:p>
+            <a:endParaRPr lang="ko-KR" altLang="en-US"/>
+          </a:p>
+        </p:txBody>
       </p:sp>
       <p:sp>
         <p:nvSpPr>
@@ -11156,6 +11870,13 @@
             <a:headEnd type="triangle"/>
           </a:ln>
         </p:spPr>
+        <p:txBody>
+          <a:bodyPr/>
+          <a:lstStyle/>
+          <a:p>
+            <a:endParaRPr lang="ko-KR" altLang="en-US"/>
+          </a:p>
+        </p:txBody>
       </p:sp>
       <p:sp>
         <p:nvSpPr>
@@ -11255,6 +11976,13 @@
           </a:solidFill>
           <a:ln/>
         </p:spPr>
+        <p:txBody>
+          <a:bodyPr/>
+          <a:lstStyle/>
+          <a:p>
+            <a:endParaRPr lang="ko-KR" altLang="en-US"/>
+          </a:p>
+        </p:txBody>
       </p:sp>
       <p:sp>
         <p:nvSpPr>
@@ -11479,6 +12207,13 @@
             </a:outerShdw>
           </a:effectLst>
         </p:spPr>
+        <p:txBody>
+          <a:bodyPr/>
+          <a:lstStyle/>
+          <a:p>
+            <a:endParaRPr lang="ko-KR" altLang="en-US"/>
+          </a:p>
+        </p:txBody>
       </p:sp>
       <p:sp>
         <p:nvSpPr>
@@ -11499,6 +12234,13 @@
           </a:solidFill>
           <a:ln/>
         </p:spPr>
+        <p:txBody>
+          <a:bodyPr/>
+          <a:lstStyle/>
+          <a:p>
+            <a:endParaRPr lang="ko-KR" altLang="en-US"/>
+          </a:p>
+        </p:txBody>
       </p:sp>
       <p:sp>
         <p:nvSpPr>
@@ -11519,6 +12261,13 @@
           </a:solidFill>
           <a:ln/>
         </p:spPr>
+        <p:txBody>
+          <a:bodyPr/>
+          <a:lstStyle/>
+          <a:p>
+            <a:endParaRPr lang="ko-KR" altLang="en-US"/>
+          </a:p>
+        </p:txBody>
       </p:sp>
       <p:sp>
         <p:nvSpPr>
@@ -11539,6 +12288,13 @@
           </a:solidFill>
           <a:ln/>
         </p:spPr>
+        <p:txBody>
+          <a:bodyPr/>
+          <a:lstStyle/>
+          <a:p>
+            <a:endParaRPr lang="ko-KR" altLang="en-US"/>
+          </a:p>
+        </p:txBody>
       </p:sp>
       <p:sp>
         <p:nvSpPr>
@@ -11831,6 +12587,13 @@
           </a:solidFill>
           <a:ln/>
         </p:spPr>
+        <p:txBody>
+          <a:bodyPr/>
+          <a:lstStyle/>
+          <a:p>
+            <a:endParaRPr lang="ko-KR" altLang="en-US"/>
+          </a:p>
+        </p:txBody>
       </p:sp>
       <p:sp>
         <p:nvSpPr>
@@ -12081,6 +12844,13 @@
           </a:solidFill>
           <a:ln/>
         </p:spPr>
+        <p:txBody>
+          <a:bodyPr/>
+          <a:lstStyle/>
+          <a:p>
+            <a:endParaRPr lang="ko-KR" altLang="en-US"/>
+          </a:p>
+        </p:txBody>
       </p:sp>
       <p:sp>
         <p:nvSpPr>
@@ -12189,6 +12959,13 @@
           </a:solidFill>
           <a:ln/>
         </p:spPr>
+        <p:txBody>
+          <a:bodyPr/>
+          <a:lstStyle/>
+          <a:p>
+            <a:endParaRPr lang="ko-KR" altLang="en-US"/>
+          </a:p>
+        </p:txBody>
       </p:sp>
       <p:sp>
         <p:nvSpPr>
@@ -12413,6 +13190,13 @@
             </a:outerShdw>
           </a:effectLst>
         </p:spPr>
+        <p:txBody>
+          <a:bodyPr/>
+          <a:lstStyle/>
+          <a:p>
+            <a:endParaRPr lang="ko-KR" altLang="en-US"/>
+          </a:p>
+        </p:txBody>
       </p:sp>
       <p:sp>
         <p:nvSpPr>
@@ -12433,6 +13217,13 @@
           </a:solidFill>
           <a:ln/>
         </p:spPr>
+        <p:txBody>
+          <a:bodyPr/>
+          <a:lstStyle/>
+          <a:p>
+            <a:endParaRPr lang="ko-KR" altLang="en-US"/>
+          </a:p>
+        </p:txBody>
       </p:sp>
       <p:sp>
         <p:nvSpPr>
@@ -12453,6 +13244,13 @@
           </a:solidFill>
           <a:ln/>
         </p:spPr>
+        <p:txBody>
+          <a:bodyPr/>
+          <a:lstStyle/>
+          <a:p>
+            <a:endParaRPr lang="ko-KR" altLang="en-US"/>
+          </a:p>
+        </p:txBody>
       </p:sp>
       <p:sp>
         <p:nvSpPr>
@@ -12473,6 +13271,13 @@
           </a:solidFill>
           <a:ln/>
         </p:spPr>
+        <p:txBody>
+          <a:bodyPr/>
+          <a:lstStyle/>
+          <a:p>
+            <a:endParaRPr lang="ko-KR" altLang="en-US"/>
+          </a:p>
+        </p:txBody>
       </p:sp>
       <p:sp>
         <p:nvSpPr>
@@ -12616,6 +13421,13 @@
           </a:solidFill>
           <a:ln/>
         </p:spPr>
+        <p:txBody>
+          <a:bodyPr/>
+          <a:lstStyle/>
+          <a:p>
+            <a:endParaRPr lang="ko-KR" altLang="en-US"/>
+          </a:p>
+        </p:txBody>
       </p:sp>
       <p:sp>
         <p:nvSpPr>
@@ -12691,6 +13503,13 @@
           </a:solidFill>
           <a:ln/>
         </p:spPr>
+        <p:txBody>
+          <a:bodyPr/>
+          <a:lstStyle/>
+          <a:p>
+            <a:endParaRPr lang="ko-KR" altLang="en-US"/>
+          </a:p>
+        </p:txBody>
       </p:sp>
       <p:sp>
         <p:nvSpPr>
@@ -13487,6 +14306,13 @@
             <a:prstDash val="solid"/>
           </a:ln>
         </p:spPr>
+        <p:txBody>
+          <a:bodyPr/>
+          <a:lstStyle/>
+          <a:p>
+            <a:endParaRPr lang="ko-KR" altLang="en-US"/>
+          </a:p>
+        </p:txBody>
       </p:sp>
       <p:sp>
         <p:nvSpPr>
@@ -13592,6 +14418,13 @@
             <a:prstDash val="solid"/>
           </a:ln>
         </p:spPr>
+        <p:txBody>
+          <a:bodyPr/>
+          <a:lstStyle/>
+          <a:p>
+            <a:endParaRPr lang="ko-KR" altLang="en-US"/>
+          </a:p>
+        </p:txBody>
       </p:sp>
       <p:sp>
         <p:nvSpPr>
@@ -13697,6 +14530,13 @@
             <a:prstDash val="solid"/>
           </a:ln>
         </p:spPr>
+        <p:txBody>
+          <a:bodyPr/>
+          <a:lstStyle/>
+          <a:p>
+            <a:endParaRPr lang="ko-KR" altLang="en-US"/>
+          </a:p>
+        </p:txBody>
       </p:sp>
       <p:sp>
         <p:nvSpPr>
@@ -13802,6 +14642,13 @@
             <a:prstDash val="solid"/>
           </a:ln>
         </p:spPr>
+        <p:txBody>
+          <a:bodyPr/>
+          <a:lstStyle/>
+          <a:p>
+            <a:endParaRPr lang="ko-KR" altLang="en-US"/>
+          </a:p>
+        </p:txBody>
       </p:sp>
       <p:sp>
         <p:nvSpPr>
@@ -13907,6 +14754,13 @@
             <a:prstDash val="solid"/>
           </a:ln>
         </p:spPr>
+        <p:txBody>
+          <a:bodyPr/>
+          <a:lstStyle/>
+          <a:p>
+            <a:endParaRPr lang="ko-KR" altLang="en-US"/>
+          </a:p>
+        </p:txBody>
       </p:sp>
       <p:sp>
         <p:nvSpPr>
@@ -14012,6 +14866,13 @@
             <a:prstDash val="solid"/>
           </a:ln>
         </p:spPr>
+        <p:txBody>
+          <a:bodyPr/>
+          <a:lstStyle/>
+          <a:p>
+            <a:endParaRPr lang="ko-KR" altLang="en-US"/>
+          </a:p>
+        </p:txBody>
       </p:sp>
       <p:sp>
         <p:nvSpPr>
@@ -14223,6 +15084,13 @@
           </a:solidFill>
           <a:ln/>
         </p:spPr>
+        <p:txBody>
+          <a:bodyPr/>
+          <a:lstStyle/>
+          <a:p>
+            <a:endParaRPr lang="ko-KR" altLang="en-US"/>
+          </a:p>
+        </p:txBody>
       </p:sp>
       <p:sp>
         <p:nvSpPr>
@@ -14675,6 +15543,13 @@
             </a:outerShdw>
           </a:effectLst>
         </p:spPr>
+        <p:txBody>
+          <a:bodyPr/>
+          <a:lstStyle/>
+          <a:p>
+            <a:endParaRPr lang="ko-KR" altLang="en-US"/>
+          </a:p>
+        </p:txBody>
       </p:sp>
       <p:sp>
         <p:nvSpPr>
@@ -14695,6 +15570,13 @@
           </a:solidFill>
           <a:ln/>
         </p:spPr>
+        <p:txBody>
+          <a:bodyPr/>
+          <a:lstStyle/>
+          <a:p>
+            <a:endParaRPr lang="ko-KR" altLang="en-US"/>
+          </a:p>
+        </p:txBody>
       </p:sp>
       <p:sp>
         <p:nvSpPr>
@@ -14715,6 +15597,13 @@
           </a:solidFill>
           <a:ln/>
         </p:spPr>
+        <p:txBody>
+          <a:bodyPr/>
+          <a:lstStyle/>
+          <a:p>
+            <a:endParaRPr lang="ko-KR" altLang="en-US"/>
+          </a:p>
+        </p:txBody>
       </p:sp>
       <p:sp>
         <p:nvSpPr>
@@ -14735,6 +15624,13 @@
           </a:solidFill>
           <a:ln/>
         </p:spPr>
+        <p:txBody>
+          <a:bodyPr/>
+          <a:lstStyle/>
+          <a:p>
+            <a:endParaRPr lang="ko-KR" altLang="en-US"/>
+          </a:p>
+        </p:txBody>
       </p:sp>
       <p:sp>
         <p:nvSpPr>
@@ -14956,6 +15852,13 @@
             </a:outerShdw>
           </a:effectLst>
         </p:spPr>
+        <p:txBody>
+          <a:bodyPr/>
+          <a:lstStyle/>
+          <a:p>
+            <a:endParaRPr lang="ko-KR" altLang="en-US"/>
+          </a:p>
+        </p:txBody>
       </p:sp>
       <p:sp>
         <p:nvSpPr>
@@ -14976,6 +15879,13 @@
           </a:solidFill>
           <a:ln/>
         </p:spPr>
+        <p:txBody>
+          <a:bodyPr/>
+          <a:lstStyle/>
+          <a:p>
+            <a:endParaRPr lang="ko-KR" altLang="en-US"/>
+          </a:p>
+        </p:txBody>
       </p:sp>
       <p:sp>
         <p:nvSpPr>
@@ -14996,6 +15906,13 @@
           </a:solidFill>
           <a:ln/>
         </p:spPr>
+        <p:txBody>
+          <a:bodyPr/>
+          <a:lstStyle/>
+          <a:p>
+            <a:endParaRPr lang="ko-KR" altLang="en-US"/>
+          </a:p>
+        </p:txBody>
       </p:sp>
       <p:sp>
         <p:nvSpPr>
@@ -15016,6 +15933,13 @@
           </a:solidFill>
           <a:ln/>
         </p:spPr>
+        <p:txBody>
+          <a:bodyPr/>
+          <a:lstStyle/>
+          <a:p>
+            <a:endParaRPr lang="ko-KR" altLang="en-US"/>
+          </a:p>
+        </p:txBody>
       </p:sp>
       <p:sp>
         <p:nvSpPr>
@@ -15139,6 +16063,13 @@
           </a:solidFill>
           <a:ln/>
         </p:spPr>
+        <p:txBody>
+          <a:bodyPr/>
+          <a:lstStyle/>
+          <a:p>
+            <a:endParaRPr lang="ko-KR" altLang="en-US"/>
+          </a:p>
+        </p:txBody>
       </p:sp>
       <p:sp>
         <p:nvSpPr>
@@ -15247,6 +16178,13 @@
           </a:solidFill>
           <a:ln/>
         </p:spPr>
+        <p:txBody>
+          <a:bodyPr/>
+          <a:lstStyle/>
+          <a:p>
+            <a:endParaRPr lang="ko-KR" altLang="en-US"/>
+          </a:p>
+        </p:txBody>
       </p:sp>
       <p:sp>
         <p:nvSpPr>
@@ -15432,6 +16370,13 @@
             </a:outerShdw>
           </a:effectLst>
         </p:spPr>
+        <p:txBody>
+          <a:bodyPr/>
+          <a:lstStyle/>
+          <a:p>
+            <a:endParaRPr lang="ko-KR" altLang="en-US"/>
+          </a:p>
+        </p:txBody>
       </p:sp>
       <p:sp>
         <p:nvSpPr>
@@ -15452,6 +16397,13 @@
           </a:solidFill>
           <a:ln/>
         </p:spPr>
+        <p:txBody>
+          <a:bodyPr/>
+          <a:lstStyle/>
+          <a:p>
+            <a:endParaRPr lang="ko-KR" altLang="en-US"/>
+          </a:p>
+        </p:txBody>
       </p:sp>
       <p:sp>
         <p:nvSpPr>
@@ -15472,6 +16424,13 @@
           </a:solidFill>
           <a:ln/>
         </p:spPr>
+        <p:txBody>
+          <a:bodyPr/>
+          <a:lstStyle/>
+          <a:p>
+            <a:endParaRPr lang="ko-KR" altLang="en-US"/>
+          </a:p>
+        </p:txBody>
       </p:sp>
       <p:sp>
         <p:nvSpPr>
@@ -15492,6 +16451,13 @@
           </a:solidFill>
           <a:ln/>
         </p:spPr>
+        <p:txBody>
+          <a:bodyPr/>
+          <a:lstStyle/>
+          <a:p>
+            <a:endParaRPr lang="ko-KR" altLang="en-US"/>
+          </a:p>
+        </p:txBody>
       </p:sp>
       <p:sp>
         <p:nvSpPr>
@@ -15711,6 +16677,13 @@
             </a:outerShdw>
           </a:effectLst>
         </p:spPr>
+        <p:txBody>
+          <a:bodyPr/>
+          <a:lstStyle/>
+          <a:p>
+            <a:endParaRPr lang="ko-KR" altLang="en-US"/>
+          </a:p>
+        </p:txBody>
       </p:sp>
       <p:sp>
         <p:nvSpPr>
@@ -15731,6 +16704,13 @@
           </a:solidFill>
           <a:ln/>
         </p:spPr>
+        <p:txBody>
+          <a:bodyPr/>
+          <a:lstStyle/>
+          <a:p>
+            <a:endParaRPr lang="ko-KR" altLang="en-US"/>
+          </a:p>
+        </p:txBody>
       </p:sp>
       <p:sp>
         <p:nvSpPr>
@@ -15751,6 +16731,13 @@
           </a:solidFill>
           <a:ln/>
         </p:spPr>
+        <p:txBody>
+          <a:bodyPr/>
+          <a:lstStyle/>
+          <a:p>
+            <a:endParaRPr lang="ko-KR" altLang="en-US"/>
+          </a:p>
+        </p:txBody>
       </p:sp>
       <p:sp>
         <p:nvSpPr>
@@ -15771,6 +16758,13 @@
           </a:solidFill>
           <a:ln/>
         </p:spPr>
+        <p:txBody>
+          <a:bodyPr/>
+          <a:lstStyle/>
+          <a:p>
+            <a:endParaRPr lang="ko-KR" altLang="en-US"/>
+          </a:p>
+        </p:txBody>
       </p:sp>
       <p:sp>
         <p:nvSpPr>
@@ -15914,6 +16908,13 @@
           </a:solidFill>
           <a:ln/>
         </p:spPr>
+        <p:txBody>
+          <a:bodyPr/>
+          <a:lstStyle/>
+          <a:p>
+            <a:endParaRPr lang="ko-KR" altLang="en-US"/>
+          </a:p>
+        </p:txBody>
       </p:sp>
       <p:sp>
         <p:nvSpPr>
@@ -16033,6 +17034,13 @@
           </a:solidFill>
           <a:ln/>
         </p:spPr>
+        <p:txBody>
+          <a:bodyPr/>
+          <a:lstStyle/>
+          <a:p>
+            <a:endParaRPr lang="ko-KR" altLang="en-US"/>
+          </a:p>
+        </p:txBody>
       </p:sp>
       <p:sp>
         <p:nvSpPr>
@@ -16222,6 +17230,13 @@
           </a:solidFill>
           <a:ln/>
         </p:spPr>
+        <p:txBody>
+          <a:bodyPr/>
+          <a:lstStyle/>
+          <a:p>
+            <a:endParaRPr lang="ko-KR" altLang="en-US"/>
+          </a:p>
+        </p:txBody>
       </p:sp>
       <p:sp>
         <p:nvSpPr>
@@ -16359,6 +17374,13 @@
             <a:prstDash val="solid"/>
           </a:ln>
         </p:spPr>
+        <p:txBody>
+          <a:bodyPr/>
+          <a:lstStyle/>
+          <a:p>
+            <a:endParaRPr lang="ko-KR" altLang="en-US"/>
+          </a:p>
+        </p:txBody>
       </p:sp>
       <p:sp>
         <p:nvSpPr>
@@ -16386,6 +17408,13 @@
             <a:prstDash val="solid"/>
           </a:ln>
         </p:spPr>
+        <p:txBody>
+          <a:bodyPr/>
+          <a:lstStyle/>
+          <a:p>
+            <a:endParaRPr lang="ko-KR" altLang="en-US"/>
+          </a:p>
+        </p:txBody>
       </p:sp>
       <p:sp>
         <p:nvSpPr>
@@ -16413,6 +17442,13 @@
             <a:prstDash val="solid"/>
           </a:ln>
         </p:spPr>
+        <p:txBody>
+          <a:bodyPr/>
+          <a:lstStyle/>
+          <a:p>
+            <a:endParaRPr lang="ko-KR" altLang="en-US"/>
+          </a:p>
+        </p:txBody>
       </p:sp>
       <p:sp>
         <p:nvSpPr>
@@ -16710,6 +17746,13 @@
             <a:tailEnd type="triangle"/>
           </a:ln>
         </p:spPr>
+        <p:txBody>
+          <a:bodyPr/>
+          <a:lstStyle/>
+          <a:p>
+            <a:endParaRPr lang="ko-KR" altLang="en-US"/>
+          </a:p>
+        </p:txBody>
       </p:sp>
       <p:sp>
         <p:nvSpPr>
@@ -16773,6 +17816,13 @@
             <a:tailEnd type="triangle"/>
           </a:ln>
         </p:spPr>
+        <p:txBody>
+          <a:bodyPr/>
+          <a:lstStyle/>
+          <a:p>
+            <a:endParaRPr lang="ko-KR" altLang="en-US"/>
+          </a:p>
+        </p:txBody>
       </p:sp>
       <p:sp>
         <p:nvSpPr>
@@ -16874,6 +17924,13 @@
             <a:prstDash val="solid"/>
           </a:ln>
         </p:spPr>
+        <p:txBody>
+          <a:bodyPr/>
+          <a:lstStyle/>
+          <a:p>
+            <a:endParaRPr lang="ko-KR" altLang="en-US"/>
+          </a:p>
+        </p:txBody>
       </p:sp>
       <p:sp>
         <p:nvSpPr>
@@ -16897,6 +17954,13 @@
             <a:prstDash val="solid"/>
           </a:ln>
         </p:spPr>
+        <p:txBody>
+          <a:bodyPr/>
+          <a:lstStyle/>
+          <a:p>
+            <a:endParaRPr lang="ko-KR" altLang="en-US"/>
+          </a:p>
+        </p:txBody>
       </p:sp>
       <p:sp>
         <p:nvSpPr>
@@ -16921,6 +17985,13 @@
             <a:headEnd type="triangle"/>
           </a:ln>
         </p:spPr>
+        <p:txBody>
+          <a:bodyPr/>
+          <a:lstStyle/>
+          <a:p>
+            <a:endParaRPr lang="ko-KR" altLang="en-US"/>
+          </a:p>
+        </p:txBody>
       </p:sp>
       <p:sp>
         <p:nvSpPr>
@@ -17020,6 +18091,13 @@
           </a:solidFill>
           <a:ln/>
         </p:spPr>
+        <p:txBody>
+          <a:bodyPr/>
+          <a:lstStyle/>
+          <a:p>
+            <a:endParaRPr lang="ko-KR" altLang="en-US"/>
+          </a:p>
+        </p:txBody>
       </p:sp>
       <p:sp>
         <p:nvSpPr>
@@ -17244,6 +18322,13 @@
             </a:outerShdw>
           </a:effectLst>
         </p:spPr>
+        <p:txBody>
+          <a:bodyPr/>
+          <a:lstStyle/>
+          <a:p>
+            <a:endParaRPr lang="ko-KR" altLang="en-US"/>
+          </a:p>
+        </p:txBody>
       </p:sp>
       <p:sp>
         <p:nvSpPr>
@@ -17264,6 +18349,13 @@
           </a:solidFill>
           <a:ln/>
         </p:spPr>
+        <p:txBody>
+          <a:bodyPr/>
+          <a:lstStyle/>
+          <a:p>
+            <a:endParaRPr lang="ko-KR" altLang="en-US"/>
+          </a:p>
+        </p:txBody>
       </p:sp>
       <p:sp>
         <p:nvSpPr>
@@ -17284,6 +18376,13 @@
           </a:solidFill>
           <a:ln/>
         </p:spPr>
+        <p:txBody>
+          <a:bodyPr/>
+          <a:lstStyle/>
+          <a:p>
+            <a:endParaRPr lang="ko-KR" altLang="en-US"/>
+          </a:p>
+        </p:txBody>
       </p:sp>
       <p:sp>
         <p:nvSpPr>
@@ -17304,6 +18403,13 @@
           </a:solidFill>
           <a:ln/>
         </p:spPr>
+        <p:txBody>
+          <a:bodyPr/>
+          <a:lstStyle/>
+          <a:p>
+            <a:endParaRPr lang="ko-KR" altLang="en-US"/>
+          </a:p>
+        </p:txBody>
       </p:sp>
       <p:sp>
         <p:nvSpPr>
@@ -17603,6 +18709,13 @@
           </a:solidFill>
           <a:ln/>
         </p:spPr>
+        <p:txBody>
+          <a:bodyPr/>
+          <a:lstStyle/>
+          <a:p>
+            <a:endParaRPr lang="ko-KR" altLang="en-US"/>
+          </a:p>
+        </p:txBody>
       </p:sp>
       <p:sp>
         <p:nvSpPr>
@@ -17711,6 +18824,13 @@
           </a:solidFill>
           <a:ln/>
         </p:spPr>
+        <p:txBody>
+          <a:bodyPr/>
+          <a:lstStyle/>
+          <a:p>
+            <a:endParaRPr lang="ko-KR" altLang="en-US"/>
+          </a:p>
+        </p:txBody>
       </p:sp>
       <p:sp>
         <p:nvSpPr>
@@ -17940,6 +19060,13 @@
             </a:outerShdw>
           </a:effectLst>
         </p:spPr>
+        <p:txBody>
+          <a:bodyPr/>
+          <a:lstStyle/>
+          <a:p>
+            <a:endParaRPr lang="ko-KR" altLang="en-US"/>
+          </a:p>
+        </p:txBody>
       </p:sp>
       <p:sp>
         <p:nvSpPr>
@@ -18146,6 +19273,13 @@
             </a:outerShdw>
           </a:effectLst>
         </p:spPr>
+        <p:txBody>
+          <a:bodyPr/>
+          <a:lstStyle/>
+          <a:p>
+            <a:endParaRPr lang="ko-KR" altLang="en-US"/>
+          </a:p>
+        </p:txBody>
       </p:sp>
       <p:sp>
         <p:nvSpPr>
@@ -18307,6 +19441,13 @@
           </a:solidFill>
           <a:ln/>
         </p:spPr>
+        <p:txBody>
+          <a:bodyPr/>
+          <a:lstStyle/>
+          <a:p>
+            <a:endParaRPr lang="ko-KR" altLang="en-US"/>
+          </a:p>
+        </p:txBody>
       </p:sp>
       <p:sp>
         <p:nvSpPr>
@@ -18415,6 +19556,13 @@
           </a:solidFill>
           <a:ln/>
         </p:spPr>
+        <p:txBody>
+          <a:bodyPr/>
+          <a:lstStyle/>
+          <a:p>
+            <a:endParaRPr lang="ko-KR" altLang="en-US"/>
+          </a:p>
+        </p:txBody>
       </p:sp>
       <p:sp>
         <p:nvSpPr>
@@ -18639,6 +19787,13 @@
             </a:outerShdw>
           </a:effectLst>
         </p:spPr>
+        <p:txBody>
+          <a:bodyPr/>
+          <a:lstStyle/>
+          <a:p>
+            <a:endParaRPr lang="ko-KR" altLang="en-US"/>
+          </a:p>
+        </p:txBody>
       </p:sp>
       <p:sp>
         <p:nvSpPr>
@@ -18659,6 +19814,13 @@
           </a:solidFill>
           <a:ln/>
         </p:spPr>
+        <p:txBody>
+          <a:bodyPr/>
+          <a:lstStyle/>
+          <a:p>
+            <a:endParaRPr lang="ko-KR" altLang="en-US"/>
+          </a:p>
+        </p:txBody>
       </p:sp>
       <p:sp>
         <p:nvSpPr>
@@ -18679,6 +19841,13 @@
           </a:solidFill>
           <a:ln/>
         </p:spPr>
+        <p:txBody>
+          <a:bodyPr/>
+          <a:lstStyle/>
+          <a:p>
+            <a:endParaRPr lang="ko-KR" altLang="en-US"/>
+          </a:p>
+        </p:txBody>
       </p:sp>
       <p:sp>
         <p:nvSpPr>
@@ -18699,6 +19868,13 @@
           </a:solidFill>
           <a:ln/>
         </p:spPr>
+        <p:txBody>
+          <a:bodyPr/>
+          <a:lstStyle/>
+          <a:p>
+            <a:endParaRPr lang="ko-KR" altLang="en-US"/>
+          </a:p>
+        </p:txBody>
       </p:sp>
       <p:sp>
         <p:nvSpPr>
@@ -19861,6 +21037,13 @@
           </a:solidFill>
           <a:ln/>
         </p:spPr>
+        <p:txBody>
+          <a:bodyPr/>
+          <a:lstStyle/>
+          <a:p>
+            <a:endParaRPr lang="ko-KR" altLang="en-US"/>
+          </a:p>
+        </p:txBody>
       </p:sp>
       <p:sp>
         <p:nvSpPr>
@@ -19962,6 +21145,13 @@
           </a:solidFill>
           <a:ln/>
         </p:spPr>
+        <p:txBody>
+          <a:bodyPr/>
+          <a:lstStyle/>
+          <a:p>
+            <a:endParaRPr lang="ko-KR" altLang="en-US"/>
+          </a:p>
+        </p:txBody>
       </p:sp>
       <p:sp>
         <p:nvSpPr>
@@ -20063,6 +21253,13 @@
           </a:solidFill>
           <a:ln/>
         </p:spPr>
+        <p:txBody>
+          <a:bodyPr/>
+          <a:lstStyle/>
+          <a:p>
+            <a:endParaRPr lang="ko-KR" altLang="en-US"/>
+          </a:p>
+        </p:txBody>
       </p:sp>
       <p:sp>
         <p:nvSpPr>
@@ -20208,6 +21405,13 @@
           </a:solidFill>
           <a:ln/>
         </p:spPr>
+        <p:txBody>
+          <a:bodyPr/>
+          <a:lstStyle/>
+          <a:p>
+            <a:endParaRPr lang="ko-KR" altLang="en-US"/>
+          </a:p>
+        </p:txBody>
       </p:sp>
       <p:sp>
         <p:nvSpPr>
@@ -20309,6 +21513,13 @@
           </a:solidFill>
           <a:ln/>
         </p:spPr>
+        <p:txBody>
+          <a:bodyPr/>
+          <a:lstStyle/>
+          <a:p>
+            <a:endParaRPr lang="ko-KR" altLang="en-US"/>
+          </a:p>
+        </p:txBody>
       </p:sp>
       <p:sp>
         <p:nvSpPr>
@@ -20410,6 +21621,13 @@
           </a:solidFill>
           <a:ln/>
         </p:spPr>
+        <p:txBody>
+          <a:bodyPr/>
+          <a:lstStyle/>
+          <a:p>
+            <a:endParaRPr lang="ko-KR" altLang="en-US"/>
+          </a:p>
+        </p:txBody>
       </p:sp>
       <p:sp>
         <p:nvSpPr>
@@ -20646,6 +21864,13 @@
           </a:solidFill>
           <a:ln/>
         </p:spPr>
+        <p:txBody>
+          <a:bodyPr/>
+          <a:lstStyle/>
+          <a:p>
+            <a:endParaRPr lang="ko-KR" altLang="en-US"/>
+          </a:p>
+        </p:txBody>
       </p:sp>
       <p:sp>
         <p:nvSpPr>
@@ -21366,6 +22591,13 @@
           </a:solidFill>
           <a:ln/>
         </p:spPr>
+        <p:txBody>
+          <a:bodyPr/>
+          <a:lstStyle/>
+          <a:p>
+            <a:endParaRPr lang="ko-KR" altLang="en-US"/>
+          </a:p>
+        </p:txBody>
       </p:sp>
       <p:sp>
         <p:nvSpPr>
@@ -21538,6 +22770,13 @@
             <a:prstDash val="solid"/>
           </a:ln>
         </p:spPr>
+        <p:txBody>
+          <a:bodyPr/>
+          <a:lstStyle/>
+          <a:p>
+            <a:endParaRPr lang="ko-KR" altLang="en-US"/>
+          </a:p>
+        </p:txBody>
       </p:sp>
       <p:sp>
         <p:nvSpPr>
@@ -21563,6 +22802,13 @@
             <a:prstDash val="solid"/>
           </a:ln>
         </p:spPr>
+        <p:txBody>
+          <a:bodyPr/>
+          <a:lstStyle/>
+          <a:p>
+            <a:endParaRPr lang="ko-KR" altLang="en-US"/>
+          </a:p>
+        </p:txBody>
       </p:sp>
       <p:sp>
         <p:nvSpPr>
@@ -21588,6 +22834,13 @@
             <a:prstDash val="solid"/>
           </a:ln>
         </p:spPr>
+        <p:txBody>
+          <a:bodyPr/>
+          <a:lstStyle/>
+          <a:p>
+            <a:endParaRPr lang="ko-KR" altLang="en-US"/>
+          </a:p>
+        </p:txBody>
       </p:sp>
       <p:sp>
         <p:nvSpPr>
@@ -21613,6 +22866,13 @@
             <a:prstDash val="solid"/>
           </a:ln>
         </p:spPr>
+        <p:txBody>
+          <a:bodyPr/>
+          <a:lstStyle/>
+          <a:p>
+            <a:endParaRPr lang="ko-KR" altLang="en-US"/>
+          </a:p>
+        </p:txBody>
       </p:sp>
       <p:sp>
         <p:nvSpPr>
@@ -21638,6 +22898,13 @@
             <a:prstDash val="solid"/>
           </a:ln>
         </p:spPr>
+        <p:txBody>
+          <a:bodyPr/>
+          <a:lstStyle/>
+          <a:p>
+            <a:endParaRPr lang="ko-KR" altLang="en-US"/>
+          </a:p>
+        </p:txBody>
       </p:sp>
       <p:sp>
         <p:nvSpPr>
@@ -21663,6 +22930,13 @@
             <a:prstDash val="solid"/>
           </a:ln>
         </p:spPr>
+        <p:txBody>
+          <a:bodyPr/>
+          <a:lstStyle/>
+          <a:p>
+            <a:endParaRPr lang="ko-KR" altLang="en-US"/>
+          </a:p>
+        </p:txBody>
       </p:sp>
       <p:sp>
         <p:nvSpPr>
@@ -21725,6 +22999,13 @@
             <a:prstDash val="solid"/>
           </a:ln>
         </p:spPr>
+        <p:txBody>
+          <a:bodyPr/>
+          <a:lstStyle/>
+          <a:p>
+            <a:endParaRPr lang="ko-KR" altLang="en-US"/>
+          </a:p>
+        </p:txBody>
       </p:sp>
       <p:sp>
         <p:nvSpPr>
@@ -21749,6 +23030,13 @@
             <a:tailEnd type="triangle" w="med" len="med"/>
           </a:ln>
         </p:spPr>
+        <p:txBody>
+          <a:bodyPr/>
+          <a:lstStyle/>
+          <a:p>
+            <a:endParaRPr lang="ko-KR" altLang="en-US"/>
+          </a:p>
+        </p:txBody>
       </p:sp>
       <p:sp>
         <p:nvSpPr>
@@ -21774,6 +23062,13 @@
             <a:prstDash val="solid"/>
           </a:ln>
         </p:spPr>
+        <p:txBody>
+          <a:bodyPr/>
+          <a:lstStyle/>
+          <a:p>
+            <a:endParaRPr lang="ko-KR" altLang="en-US"/>
+          </a:p>
+        </p:txBody>
       </p:sp>
       <p:sp>
         <p:nvSpPr>
@@ -21799,6 +23094,13 @@
             <a:prstDash val="solid"/>
           </a:ln>
         </p:spPr>
+        <p:txBody>
+          <a:bodyPr/>
+          <a:lstStyle/>
+          <a:p>
+            <a:endParaRPr lang="ko-KR" altLang="en-US"/>
+          </a:p>
+        </p:txBody>
       </p:sp>
       <p:sp>
         <p:nvSpPr>
@@ -22001,6 +23303,13 @@
             <a:tailEnd type="triangle" w="med" len="med"/>
           </a:ln>
         </p:spPr>
+        <p:txBody>
+          <a:bodyPr/>
+          <a:lstStyle/>
+          <a:p>
+            <a:endParaRPr lang="ko-KR" altLang="en-US"/>
+          </a:p>
+        </p:txBody>
       </p:sp>
     </p:spTree>
   </p:cSld>
@@ -22056,6 +23365,13 @@
           </a:solidFill>
           <a:ln/>
         </p:spPr>
+        <p:txBody>
+          <a:bodyPr/>
+          <a:lstStyle/>
+          <a:p>
+            <a:endParaRPr lang="ko-KR" altLang="en-US"/>
+          </a:p>
+        </p:txBody>
       </p:sp>
       <p:sp>
         <p:nvSpPr>
@@ -22285,6 +23601,13 @@
             </a:outerShdw>
           </a:effectLst>
         </p:spPr>
+        <p:txBody>
+          <a:bodyPr/>
+          <a:lstStyle/>
+          <a:p>
+            <a:endParaRPr lang="ko-KR" altLang="en-US"/>
+          </a:p>
+        </p:txBody>
       </p:sp>
       <p:sp>
         <p:nvSpPr>
@@ -22351,6 +23674,13 @@
             <a:prstDash val="solid"/>
           </a:ln>
         </p:spPr>
+        <p:txBody>
+          <a:bodyPr/>
+          <a:lstStyle/>
+          <a:p>
+            <a:endParaRPr lang="ko-KR" altLang="en-US"/>
+          </a:p>
+        </p:txBody>
       </p:sp>
       <p:sp>
         <p:nvSpPr>
@@ -22417,6 +23747,13 @@
             <a:prstDash val="solid"/>
           </a:ln>
         </p:spPr>
+        <p:txBody>
+          <a:bodyPr/>
+          <a:lstStyle/>
+          <a:p>
+            <a:endParaRPr lang="ko-KR" altLang="en-US"/>
+          </a:p>
+        </p:txBody>
       </p:sp>
       <p:sp>
         <p:nvSpPr>
@@ -22483,6 +23820,13 @@
             <a:prstDash val="solid"/>
           </a:ln>
         </p:spPr>
+        <p:txBody>
+          <a:bodyPr/>
+          <a:lstStyle/>
+          <a:p>
+            <a:endParaRPr lang="ko-KR" altLang="en-US"/>
+          </a:p>
+        </p:txBody>
       </p:sp>
       <p:sp>
         <p:nvSpPr>
@@ -24430,6 +25774,13 @@
           </a:solidFill>
           <a:ln/>
         </p:spPr>
+        <p:txBody>
+          <a:bodyPr/>
+          <a:lstStyle/>
+          <a:p>
+            <a:endParaRPr lang="ko-KR" altLang="en-US"/>
+          </a:p>
+        </p:txBody>
       </p:sp>
       <p:sp>
         <p:nvSpPr>
@@ -24606,6 +25957,13 @@
           </a:solidFill>
           <a:ln/>
         </p:spPr>
+        <p:txBody>
+          <a:bodyPr/>
+          <a:lstStyle/>
+          <a:p>
+            <a:endParaRPr lang="ko-KR" altLang="en-US"/>
+          </a:p>
+        </p:txBody>
       </p:sp>
       <p:sp>
         <p:nvSpPr>
@@ -24679,6 +26037,13 @@
             </a:outerShdw>
           </a:effectLst>
         </p:spPr>
+        <p:txBody>
+          <a:bodyPr/>
+          <a:lstStyle/>
+          <a:p>
+            <a:endParaRPr lang="ko-KR" altLang="en-US"/>
+          </a:p>
+        </p:txBody>
       </p:sp>
       <p:sp>
         <p:nvSpPr>
@@ -24777,6 +26142,13 @@
           </a:solidFill>
           <a:ln/>
         </p:spPr>
+        <p:txBody>
+          <a:bodyPr/>
+          <a:lstStyle/>
+          <a:p>
+            <a:endParaRPr lang="ko-KR" altLang="en-US"/>
+          </a:p>
+        </p:txBody>
       </p:sp>
       <p:sp>
         <p:nvSpPr>
@@ -24850,6 +26222,13 @@
             </a:outerShdw>
           </a:effectLst>
         </p:spPr>
+        <p:txBody>
+          <a:bodyPr/>
+          <a:lstStyle/>
+          <a:p>
+            <a:endParaRPr lang="ko-KR" altLang="en-US"/>
+          </a:p>
+        </p:txBody>
       </p:sp>
       <p:sp>
         <p:nvSpPr>
@@ -24992,6 +26371,13 @@
           </a:solidFill>
           <a:ln/>
         </p:spPr>
+        <p:txBody>
+          <a:bodyPr/>
+          <a:lstStyle/>
+          <a:p>
+            <a:endParaRPr lang="ko-KR" altLang="en-US"/>
+          </a:p>
+        </p:txBody>
       </p:sp>
       <p:sp>
         <p:nvSpPr>
@@ -25065,6 +26451,13 @@
             </a:outerShdw>
           </a:effectLst>
         </p:spPr>
+        <p:txBody>
+          <a:bodyPr/>
+          <a:lstStyle/>
+          <a:p>
+            <a:endParaRPr lang="ko-KR" altLang="en-US"/>
+          </a:p>
+        </p:txBody>
       </p:sp>
       <p:sp>
         <p:nvSpPr>
@@ -25190,6 +26583,13 @@
           </a:solidFill>
           <a:ln/>
         </p:spPr>
+        <p:txBody>
+          <a:bodyPr/>
+          <a:lstStyle/>
+          <a:p>
+            <a:endParaRPr lang="ko-KR" altLang="en-US"/>
+          </a:p>
+        </p:txBody>
       </p:sp>
       <p:sp>
         <p:nvSpPr>
@@ -25412,6 +26812,13 @@
             <a:prstDash val="solid"/>
           </a:ln>
         </p:spPr>
+        <p:txBody>
+          <a:bodyPr/>
+          <a:lstStyle/>
+          <a:p>
+            <a:endParaRPr lang="ko-KR" altLang="en-US"/>
+          </a:p>
+        </p:txBody>
       </p:sp>
       <p:sp>
         <p:nvSpPr>
@@ -25478,6 +26885,13 @@
             <a:prstDash val="solid"/>
           </a:ln>
         </p:spPr>
+        <p:txBody>
+          <a:bodyPr/>
+          <a:lstStyle/>
+          <a:p>
+            <a:endParaRPr lang="ko-KR" altLang="en-US"/>
+          </a:p>
+        </p:txBody>
       </p:sp>
       <p:sp>
         <p:nvSpPr>
@@ -25540,6 +26954,13 @@
             <a:prstDash val="solid"/>
           </a:ln>
         </p:spPr>
+        <p:txBody>
+          <a:bodyPr/>
+          <a:lstStyle/>
+          <a:p>
+            <a:endParaRPr lang="ko-KR" altLang="en-US"/>
+          </a:p>
+        </p:txBody>
       </p:sp>
       <p:sp>
         <p:nvSpPr>
@@ -25567,6 +26988,13 @@
             <a:prstDash val="solid"/>
           </a:ln>
         </p:spPr>
+        <p:txBody>
+          <a:bodyPr/>
+          <a:lstStyle/>
+          <a:p>
+            <a:endParaRPr lang="ko-KR" altLang="en-US"/>
+          </a:p>
+        </p:txBody>
       </p:sp>
       <p:sp>
         <p:nvSpPr>
@@ -25629,6 +27057,13 @@
             <a:prstDash val="solid"/>
           </a:ln>
         </p:spPr>
+        <p:txBody>
+          <a:bodyPr/>
+          <a:lstStyle/>
+          <a:p>
+            <a:endParaRPr lang="ko-KR" altLang="en-US"/>
+          </a:p>
+        </p:txBody>
       </p:sp>
       <p:sp>
         <p:nvSpPr>
@@ -25656,6 +27091,13 @@
             <a:prstDash val="solid"/>
           </a:ln>
         </p:spPr>
+        <p:txBody>
+          <a:bodyPr/>
+          <a:lstStyle/>
+          <a:p>
+            <a:endParaRPr lang="ko-KR" altLang="en-US"/>
+          </a:p>
+        </p:txBody>
       </p:sp>
       <p:sp>
         <p:nvSpPr>
@@ -25718,6 +27160,13 @@
             <a:prstDash val="solid"/>
           </a:ln>
         </p:spPr>
+        <p:txBody>
+          <a:bodyPr/>
+          <a:lstStyle/>
+          <a:p>
+            <a:endParaRPr lang="ko-KR" altLang="en-US"/>
+          </a:p>
+        </p:txBody>
       </p:sp>
       <p:sp>
         <p:nvSpPr>
@@ -25745,6 +27194,13 @@
             <a:prstDash val="solid"/>
           </a:ln>
         </p:spPr>
+        <p:txBody>
+          <a:bodyPr/>
+          <a:lstStyle/>
+          <a:p>
+            <a:endParaRPr lang="ko-KR" altLang="en-US"/>
+          </a:p>
+        </p:txBody>
       </p:sp>
       <p:sp>
         <p:nvSpPr>
@@ -25807,6 +27263,13 @@
             <a:prstDash val="solid"/>
           </a:ln>
         </p:spPr>
+        <p:txBody>
+          <a:bodyPr/>
+          <a:lstStyle/>
+          <a:p>
+            <a:endParaRPr lang="ko-KR" altLang="en-US"/>
+          </a:p>
+        </p:txBody>
       </p:sp>
       <p:graphicFrame>
         <p:nvGraphicFramePr>
@@ -26473,6 +27936,13 @@
           </a:solidFill>
           <a:ln/>
         </p:spPr>
+        <p:txBody>
+          <a:bodyPr/>
+          <a:lstStyle/>
+          <a:p>
+            <a:endParaRPr lang="ko-KR" altLang="en-US"/>
+          </a:p>
+        </p:txBody>
       </p:sp>
       <p:sp>
         <p:nvSpPr>
@@ -26695,6 +28165,13 @@
             <a:prstDash val="solid"/>
           </a:ln>
         </p:spPr>
+        <p:txBody>
+          <a:bodyPr/>
+          <a:lstStyle/>
+          <a:p>
+            <a:endParaRPr lang="ko-KR" altLang="en-US"/>
+          </a:p>
+        </p:txBody>
       </p:sp>
       <p:sp>
         <p:nvSpPr>
@@ -26784,6 +28261,13 @@
             <a:prstDash val="solid"/>
           </a:ln>
         </p:spPr>
+        <p:txBody>
+          <a:bodyPr/>
+          <a:lstStyle/>
+          <a:p>
+            <a:endParaRPr lang="ko-KR" altLang="en-US"/>
+          </a:p>
+        </p:txBody>
       </p:sp>
       <p:sp>
         <p:nvSpPr>
@@ -26871,6 +28355,13 @@
             <a:tailEnd type="triangle"/>
           </a:ln>
         </p:spPr>
+        <p:txBody>
+          <a:bodyPr/>
+          <a:lstStyle/>
+          <a:p>
+            <a:endParaRPr lang="ko-KR" altLang="en-US"/>
+          </a:p>
+        </p:txBody>
       </p:sp>
       <p:sp>
         <p:nvSpPr>
@@ -26898,6 +28389,13 @@
             <a:prstDash val="solid"/>
           </a:ln>
         </p:spPr>
+        <p:txBody>
+          <a:bodyPr/>
+          <a:lstStyle/>
+          <a:p>
+            <a:endParaRPr lang="ko-KR" altLang="en-US"/>
+          </a:p>
+        </p:txBody>
       </p:sp>
       <p:sp>
         <p:nvSpPr>
@@ -26985,6 +28483,13 @@
             <a:tailEnd type="triangle"/>
           </a:ln>
         </p:spPr>
+        <p:txBody>
+          <a:bodyPr/>
+          <a:lstStyle/>
+          <a:p>
+            <a:endParaRPr lang="ko-KR" altLang="en-US"/>
+          </a:p>
+        </p:txBody>
       </p:sp>
       <p:sp>
         <p:nvSpPr>
@@ -27012,6 +28517,13 @@
             <a:prstDash val="solid"/>
           </a:ln>
         </p:spPr>
+        <p:txBody>
+          <a:bodyPr/>
+          <a:lstStyle/>
+          <a:p>
+            <a:endParaRPr lang="ko-KR" altLang="en-US"/>
+          </a:p>
+        </p:txBody>
       </p:sp>
       <p:sp>
         <p:nvSpPr>
@@ -27099,6 +28611,13 @@
             <a:tailEnd type="triangle"/>
           </a:ln>
         </p:spPr>
+        <p:txBody>
+          <a:bodyPr/>
+          <a:lstStyle/>
+          <a:p>
+            <a:endParaRPr lang="ko-KR" altLang="en-US"/>
+          </a:p>
+        </p:txBody>
       </p:sp>
       <p:sp>
         <p:nvSpPr>
@@ -27126,6 +28645,13 @@
             <a:prstDash val="solid"/>
           </a:ln>
         </p:spPr>
+        <p:txBody>
+          <a:bodyPr/>
+          <a:lstStyle/>
+          <a:p>
+            <a:endParaRPr lang="ko-KR" altLang="en-US"/>
+          </a:p>
+        </p:txBody>
       </p:sp>
       <p:sp>
         <p:nvSpPr>
@@ -27213,6 +28739,13 @@
             <a:tailEnd type="triangle"/>
           </a:ln>
         </p:spPr>
+        <p:txBody>
+          <a:bodyPr/>
+          <a:lstStyle/>
+          <a:p>
+            <a:endParaRPr lang="ko-KR" altLang="en-US"/>
+          </a:p>
+        </p:txBody>
       </p:sp>
       <p:sp>
         <p:nvSpPr>
@@ -27235,6 +28768,13 @@
           </a:solidFill>
           <a:ln/>
         </p:spPr>
+        <p:txBody>
+          <a:bodyPr/>
+          <a:lstStyle/>
+          <a:p>
+            <a:endParaRPr lang="ko-KR" altLang="en-US"/>
+          </a:p>
+        </p:txBody>
       </p:sp>
       <p:sp>
         <p:nvSpPr>
@@ -27453,6 +28993,13 @@
           </a:solidFill>
           <a:ln/>
         </p:spPr>
+        <p:txBody>
+          <a:bodyPr/>
+          <a:lstStyle/>
+          <a:p>
+            <a:endParaRPr lang="ko-KR" altLang="en-US"/>
+          </a:p>
+        </p:txBody>
       </p:sp>
       <p:sp>
         <p:nvSpPr>
@@ -27643,6 +29190,13 @@
             </a:outerShdw>
           </a:effectLst>
         </p:spPr>
+        <p:txBody>
+          <a:bodyPr/>
+          <a:lstStyle/>
+          <a:p>
+            <a:endParaRPr lang="ko-KR" altLang="en-US"/>
+          </a:p>
+        </p:txBody>
       </p:sp>
       <p:sp>
         <p:nvSpPr>
@@ -28024,6 +29578,13 @@
             <a:prstDash val="solid"/>
           </a:ln>
         </p:spPr>
+        <p:txBody>
+          <a:bodyPr/>
+          <a:lstStyle/>
+          <a:p>
+            <a:endParaRPr lang="ko-KR" altLang="en-US"/>
+          </a:p>
+        </p:txBody>
       </p:sp>
       <p:sp>
         <p:nvSpPr>
@@ -28180,6 +29741,13 @@
           </a:solidFill>
           <a:ln/>
         </p:spPr>
+        <p:txBody>
+          <a:bodyPr/>
+          <a:lstStyle/>
+          <a:p>
+            <a:endParaRPr lang="ko-KR" altLang="en-US"/>
+          </a:p>
+        </p:txBody>
       </p:sp>
       <p:sp>
         <p:nvSpPr>
@@ -28292,7 +29860,29 @@
                 <a:ea typeface="Calibri" pitchFamily="34" charset="-122"/>
                 <a:cs typeface="Calibri" pitchFamily="34" charset="-120"/>
               </a:rPr>
-              <a:t>Git은 변경 사항이 아니라, 매 커밋마다 전체 상태의 "스냅샷"을 저장합니다.</a:t>
+              <a:t>Git은 변경 사항이 아니라, 매 커밋마다 전체 상태의 "</a:t>
+            </a:r>
+            <a:r>
+              <a:rPr lang="en-US" sz="1450" dirty="0">
+                <a:solidFill>
+                  <a:srgbClr val="FF0000"/>
+                </a:solidFill>
+                <a:latin typeface="Calibri" pitchFamily="34" charset="0"/>
+                <a:ea typeface="Calibri" pitchFamily="34" charset="-122"/>
+                <a:cs typeface="Calibri" pitchFamily="34" charset="-120"/>
+              </a:rPr>
+              <a:t>스냅샷</a:t>
+            </a:r>
+            <a:r>
+              <a:rPr lang="en-US" sz="1450" dirty="0">
+                <a:solidFill>
+                  <a:srgbClr val="6B7280"/>
+                </a:solidFill>
+                <a:latin typeface="Calibri" pitchFamily="34" charset="0"/>
+                <a:ea typeface="Calibri" pitchFamily="34" charset="-122"/>
+                <a:cs typeface="Calibri" pitchFamily="34" charset="-120"/>
+              </a:rPr>
+              <a:t>"을 저장합니다.</a:t>
             </a:r>
             <a:endParaRPr lang="en-US" sz="1450" dirty="0"/>
           </a:p>
@@ -28409,6 +29999,13 @@
             </a:outerShdw>
           </a:effectLst>
         </p:spPr>
+        <p:txBody>
+          <a:bodyPr/>
+          <a:lstStyle/>
+          <a:p>
+            <a:endParaRPr lang="ko-KR" altLang="en-US"/>
+          </a:p>
+        </p:txBody>
       </p:sp>
       <p:sp>
         <p:nvSpPr>
@@ -28475,6 +30072,13 @@
             <a:prstDash val="solid"/>
           </a:ln>
         </p:spPr>
+        <p:txBody>
+          <a:bodyPr/>
+          <a:lstStyle/>
+          <a:p>
+            <a:endParaRPr lang="ko-KR" altLang="en-US"/>
+          </a:p>
+        </p:txBody>
       </p:sp>
       <p:sp>
         <p:nvSpPr>
@@ -28541,6 +30145,13 @@
             <a:prstDash val="solid"/>
           </a:ln>
         </p:spPr>
+        <p:txBody>
+          <a:bodyPr/>
+          <a:lstStyle/>
+          <a:p>
+            <a:endParaRPr lang="ko-KR" altLang="en-US"/>
+          </a:p>
+        </p:txBody>
       </p:sp>
       <p:sp>
         <p:nvSpPr>
@@ -28607,6 +30218,13 @@
             <a:prstDash val="solid"/>
           </a:ln>
         </p:spPr>
+        <p:txBody>
+          <a:bodyPr/>
+          <a:lstStyle/>
+          <a:p>
+            <a:endParaRPr lang="ko-KR" altLang="en-US"/>
+          </a:p>
+        </p:txBody>
       </p:sp>
       <p:sp>
         <p:nvSpPr>
@@ -28673,6 +30291,13 @@
             <a:prstDash val="solid"/>
           </a:ln>
         </p:spPr>
+        <p:txBody>
+          <a:bodyPr/>
+          <a:lstStyle/>
+          <a:p>
+            <a:endParaRPr lang="ko-KR" altLang="en-US"/>
+          </a:p>
+        </p:txBody>
       </p:sp>
       <p:sp>
         <p:nvSpPr>
@@ -28739,6 +30364,13 @@
             <a:prstDash val="solid"/>
           </a:ln>
         </p:spPr>
+        <p:txBody>
+          <a:bodyPr/>
+          <a:lstStyle/>
+          <a:p>
+            <a:endParaRPr lang="ko-KR" altLang="en-US"/>
+          </a:p>
+        </p:txBody>
       </p:sp>
       <p:sp>
         <p:nvSpPr>
@@ -28805,6 +30437,13 @@
             <a:prstDash val="solid"/>
           </a:ln>
         </p:spPr>
+        <p:txBody>
+          <a:bodyPr/>
+          <a:lstStyle/>
+          <a:p>
+            <a:endParaRPr lang="ko-KR" altLang="en-US"/>
+          </a:p>
+        </p:txBody>
       </p:sp>
       <p:sp>
         <p:nvSpPr>
@@ -28871,6 +30510,13 @@
             <a:prstDash val="solid"/>
           </a:ln>
         </p:spPr>
+        <p:txBody>
+          <a:bodyPr/>
+          <a:lstStyle/>
+          <a:p>
+            <a:endParaRPr lang="ko-KR" altLang="en-US"/>
+          </a:p>
+        </p:txBody>
       </p:sp>
       <p:sp>
         <p:nvSpPr>
@@ -28937,6 +30583,13 @@
             <a:prstDash val="solid"/>
           </a:ln>
         </p:spPr>
+        <p:txBody>
+          <a:bodyPr/>
+          <a:lstStyle/>
+          <a:p>
+            <a:endParaRPr lang="ko-KR" altLang="en-US"/>
+          </a:p>
+        </p:txBody>
       </p:sp>
       <p:sp>
         <p:nvSpPr>
@@ -29003,6 +30656,13 @@
             <a:prstDash val="solid"/>
           </a:ln>
         </p:spPr>
+        <p:txBody>
+          <a:bodyPr/>
+          <a:lstStyle/>
+          <a:p>
+            <a:endParaRPr lang="ko-KR" altLang="en-US"/>
+          </a:p>
+        </p:txBody>
       </p:sp>
       <p:sp>
         <p:nvSpPr>
@@ -29069,6 +30729,13 @@
             <a:prstDash val="solid"/>
           </a:ln>
         </p:spPr>
+        <p:txBody>
+          <a:bodyPr/>
+          <a:lstStyle/>
+          <a:p>
+            <a:endParaRPr lang="ko-KR" altLang="en-US"/>
+          </a:p>
+        </p:txBody>
       </p:sp>
       <p:sp>
         <p:nvSpPr>
@@ -29135,6 +30802,13 @@
             <a:prstDash val="solid"/>
           </a:ln>
         </p:spPr>
+        <p:txBody>
+          <a:bodyPr/>
+          <a:lstStyle/>
+          <a:p>
+            <a:endParaRPr lang="ko-KR" altLang="en-US"/>
+          </a:p>
+        </p:txBody>
       </p:sp>
       <p:sp>
         <p:nvSpPr>
@@ -29201,6 +30875,13 @@
             <a:prstDash val="solid"/>
           </a:ln>
         </p:spPr>
+        <p:txBody>
+          <a:bodyPr/>
+          <a:lstStyle/>
+          <a:p>
+            <a:endParaRPr lang="ko-KR" altLang="en-US"/>
+          </a:p>
+        </p:txBody>
       </p:sp>
       <p:sp>
         <p:nvSpPr>
@@ -29306,6 +30987,13 @@
             <a:prstDash val="solid"/>
           </a:ln>
         </p:spPr>
+        <p:txBody>
+          <a:bodyPr/>
+          <a:lstStyle/>
+          <a:p>
+            <a:endParaRPr lang="ko-KR" altLang="en-US"/>
+          </a:p>
+        </p:txBody>
       </p:sp>
       <p:sp>
         <p:nvSpPr>
@@ -29457,6 +31145,13 @@
             <a:prstDash val="solid"/>
           </a:ln>
         </p:spPr>
+        <p:txBody>
+          <a:bodyPr/>
+          <a:lstStyle/>
+          <a:p>
+            <a:endParaRPr lang="ko-KR" altLang="en-US"/>
+          </a:p>
+        </p:txBody>
       </p:sp>
       <p:sp>
         <p:nvSpPr>
@@ -29556,6 +31251,13 @@
             <a:prstDash val="solid"/>
           </a:ln>
         </p:spPr>
+        <p:txBody>
+          <a:bodyPr/>
+          <a:lstStyle/>
+          <a:p>
+            <a:endParaRPr lang="ko-KR" altLang="en-US"/>
+          </a:p>
+        </p:txBody>
       </p:sp>
       <p:sp>
         <p:nvSpPr>
@@ -29622,6 +31324,13 @@
             <a:prstDash val="solid"/>
           </a:ln>
         </p:spPr>
+        <p:txBody>
+          <a:bodyPr/>
+          <a:lstStyle/>
+          <a:p>
+            <a:endParaRPr lang="ko-KR" altLang="en-US"/>
+          </a:p>
+        </p:txBody>
       </p:sp>
       <p:sp>
         <p:nvSpPr>
@@ -29688,6 +31397,13 @@
             <a:prstDash val="solid"/>
           </a:ln>
         </p:spPr>
+        <p:txBody>
+          <a:bodyPr/>
+          <a:lstStyle/>
+          <a:p>
+            <a:endParaRPr lang="ko-KR" altLang="en-US"/>
+          </a:p>
+        </p:txBody>
       </p:sp>
       <p:sp>
         <p:nvSpPr>
@@ -29754,6 +31470,13 @@
             <a:prstDash val="solid"/>
           </a:ln>
         </p:spPr>
+        <p:txBody>
+          <a:bodyPr/>
+          <a:lstStyle/>
+          <a:p>
+            <a:endParaRPr lang="ko-KR" altLang="en-US"/>
+          </a:p>
+        </p:txBody>
       </p:sp>
       <p:sp>
         <p:nvSpPr>
@@ -29820,6 +31543,13 @@
             <a:prstDash val="solid"/>
           </a:ln>
         </p:spPr>
+        <p:txBody>
+          <a:bodyPr/>
+          <a:lstStyle/>
+          <a:p>
+            <a:endParaRPr lang="ko-KR" altLang="en-US"/>
+          </a:p>
+        </p:txBody>
       </p:sp>
       <p:sp>
         <p:nvSpPr>
@@ -29886,6 +31616,13 @@
             <a:prstDash val="solid"/>
           </a:ln>
         </p:spPr>
+        <p:txBody>
+          <a:bodyPr/>
+          <a:lstStyle/>
+          <a:p>
+            <a:endParaRPr lang="ko-KR" altLang="en-US"/>
+          </a:p>
+        </p:txBody>
       </p:sp>
       <p:sp>
         <p:nvSpPr>
@@ -29952,6 +31689,13 @@
             <a:prstDash val="solid"/>
           </a:ln>
         </p:spPr>
+        <p:txBody>
+          <a:bodyPr/>
+          <a:lstStyle/>
+          <a:p>
+            <a:endParaRPr lang="ko-KR" altLang="en-US"/>
+          </a:p>
+        </p:txBody>
       </p:sp>
       <p:sp>
         <p:nvSpPr>
